--- a/protected-downloads/praesentation/TL05.pptx
+++ b/protected-downloads/praesentation/TL05.pptx
@@ -4904,7 +4904,7 @@
                 </a:solidFill>
                 <a:latin typeface="Arial"/>
               </a:rPr>
-              <a:t>v0.2</a:t>
+              <a:t>v1.0</a:t>
             </a:r>
           </a:p>
         </p:txBody>

--- a/protected-downloads/praesentation/TL05.pptx
+++ b/protected-downloads/praesentation/TL05.pptx
@@ -594,22 +594,22 @@
           <a:lstStyle/>
           <a:p>
             <a:r>
-              <a:t>Timo-Szenario als Fallszenario (6 Monate, weit hinter Plan – noch nicht angesprochen).</a:t>
-            </a:r>
-          </a:p>
-          <a:p>
-            <a:r>
-              <a:t>Zwischenerinnerung nach 12 Min.: 'Prüfen Sie: Ist Ihr Einstiegssatz eine Frage oder eine Aussage?'</a:t>
-            </a:r>
-          </a:p>
-          <a:p>
-            <a:r>
-              <a:t>Nach Einzelarbeit: 2-Min.-Blitzauswertung im Plenum – ein TN nennt seine Kernhypothese.</a:t>
-            </a:r>
-          </a:p>
-          <a:p>
-            <a:r>
-              <a:t>Kollegiale Fallberatung (25 Min.) in 3–4er-Gruppen: Schritt 5 (schwierige Konstellation) gemeinsam bearbeiten. Timo-Szenario als Hauptfall planen – eigene Fälle als Bonus.</a:t>
+              <a:t>Sandra-Szenario: 8 Jahre FK, stärkste Abschlussquote, aber Anlassgespräche konstant halbiert (5 von Ziel 10). Halbjahres-Zielgespräch.</a:t>
+            </a:r>
+          </a:p>
+          <a:p>
+            <a:r>
+              <a:t>Sprachcheck-Instruktion: 'Wenn ich als Berater diesen Satz höre – will ich antworten und mitdenken, oder will ich mich verteidigen?' Kein Rollenspiel – es geht um den Text.</a:t>
+            </a:r>
+          </a:p>
+          <a:p>
+            <a:r>
+              <a:t>Zwischenerinnerung nach 10 Min.: Einstiegssatz muss drei Elemente enthalten: Stärke anerkennen, Entwicklungsfrage benennen, gemeinsame Arbeit einladen.</a:t>
+            </a:r>
+          </a:p>
+          <a:p>
+            <a:r>
+              <a:t>Plenum-Auswertung (205–215 Min.): Erste vs. zweite Version vergleichen – was hat der Sprachcheck konkret verändert?</a:t>
             </a:r>
           </a:p>
         </p:txBody>
@@ -679,22 +679,17 @@
           <a:lstStyle/>
           <a:p>
             <a:r>
-              <a:t>Sandra-Szenario: 8 Jahre FK, stärkste Abschlussquote, aber Anlassgespräche konstant halbiert (5 von Ziel 10). Halbjahres-Zielgespräch.</a:t>
-            </a:r>
-          </a:p>
-          <a:p>
-            <a:r>
-              <a:t>Sprachcheck-Instruktion: 'Wenn ich als Berater diesen Satz höre – will ich antworten und mitdenken, oder will ich mich verteidigen?' Kein Rollenspiel – es geht um den Text.</a:t>
-            </a:r>
-          </a:p>
-          <a:p>
-            <a:r>
-              <a:t>Zwischenerinnerung nach 10 Min.: Einstiegssatz muss drei Elemente enthalten: Stärke anerkennen, Entwicklungsfrage benennen, gemeinsame Arbeit einladen.</a:t>
-            </a:r>
-          </a:p>
-          <a:p>
-            <a:r>
-              <a:t>Plenum-Auswertung (205–215 Min.): Erste vs. zweite Version vergleichen – was hat der Sprachcheck konkret verändert?</a:t>
+              <a:t>Selbstcheck (Sec 5) in Stille ausfüllen (4 Min.): Welche Frage ist die unbequemste?</a:t>
+            </a:r>
+          </a:p>
+          <a:p>
+            <a:r>
+              <a:t>Plenumsfrage: 'Was nehme ich heute Nachmittag mit – eine konkrete Handlung bis Ende dieser Woche?' Lassen Sie 2–3 TN antworten.</a:t>
+            </a:r>
+          </a:p>
+          <a:p>
+            <a:r>
+              <a:t>Transferaufgabe 3 besonders betonen: schwierige Konstellation aus dem eigenen Team – das ist der Brückenfall zu TL06.</a:t>
             </a:r>
           </a:p>
         </p:txBody>
@@ -764,86 +759,6 @@
           <a:lstStyle/>
           <a:p>
             <a:r>
-              <a:t>Selbstcheck (Sec 5) in Stille ausfüllen (4 Min.): Welche Frage ist die unbequemste?</a:t>
-            </a:r>
-          </a:p>
-          <a:p>
-            <a:r>
-              <a:t>Plenumsfrage: 'Was nehme ich heute Nachmittag mit – eine konkrete Handlung bis Ende dieser Woche?' Lassen Sie 2–3 TN antworten.</a:t>
-            </a:r>
-          </a:p>
-          <a:p>
-            <a:r>
-              <a:t>Transferaufgabe 3 besonders betonen: schwierige Konstellation aus dem eigenen Team – das ist der Brückenfall zu TL06.</a:t>
-            </a:r>
-          </a:p>
-        </p:txBody>
-      </p:sp>
-      <p:sp>
-        <p:nvSpPr>
-          <p:cNvPr id="4" name="Slide Number Placeholder 3"/>
-          <p:cNvSpPr>
-            <a:spLocks noGrp="1"/>
-          </p:cNvSpPr>
-          <p:nvPr>
-            <p:ph type="sldNum" idx="5" sz="quarter"/>
-          </p:nvPr>
-        </p:nvSpPr>
-        <p:spPr/>
-      </p:sp>
-    </p:spTree>
-  </p:cSld>
-  <p:clrMapOvr>
-    <a:masterClrMapping/>
-  </p:clrMapOvr>
-</p:notes>
-</file>
-
-<file path=ppt/notesSlides/notesSlide13.xml><?xml version="1.0" encoding="utf-8"?>
-<p:notes xmlns:a="http://schemas.openxmlformats.org/drawingml/2006/main" xmlns:p="http://schemas.openxmlformats.org/presentationml/2006/main" xmlns:r="http://schemas.openxmlformats.org/officeDocument/2006/relationships">
-  <p:cSld>
-    <p:spTree>
-      <p:nvGrpSpPr>
-        <p:cNvPr id="1" name=""/>
-        <p:cNvGrpSpPr/>
-        <p:nvPr/>
-      </p:nvGrpSpPr>
-      <p:grpSpPr>
-        <a:xfrm>
-          <a:off x="0" y="0"/>
-          <a:ext cx="0" cy="0"/>
-          <a:chOff x="0" y="0"/>
-          <a:chExt cx="0" cy="0"/>
-        </a:xfrm>
-      </p:grpSpPr>
-      <p:sp>
-        <p:nvSpPr>
-          <p:cNvPr id="2" name="Slide Image Placeholder 1"/>
-          <p:cNvSpPr>
-            <a:spLocks noGrp="1"/>
-          </p:cNvSpPr>
-          <p:nvPr>
-            <p:ph type="sldImg" idx="2"/>
-          </p:nvPr>
-        </p:nvSpPr>
-        <p:spPr/>
-      </p:sp>
-      <p:sp>
-        <p:nvSpPr>
-          <p:cNvPr id="3" name="Notes Placeholder 2"/>
-          <p:cNvSpPr>
-            <a:spLocks noGrp="1"/>
-          </p:cNvSpPr>
-          <p:nvPr>
-            <p:ph type="body" idx="3" sz="quarter"/>
-          </p:nvPr>
-        </p:nvSpPr>
-        <p:spPr/>
-        <p:txBody>
-          <a:bodyPr/>
-          <a:lstStyle/>
-          <a:p>
-            <a:r>
               <a:t>Greenleaf (1977): 'Wachsen die Menschen, denen Sie führend begegnen?'</a:t>
             </a:r>
           </a:p>
@@ -924,7 +839,17 @@
           <a:lstStyle/>
           <a:p>
             <a:r>
-              <a:t>Siehe Trainerhandbuch (Sektion 3) für Moderationshinweise, Timing und erwartete Teilnehmerreaktionen.</a:t>
+              <a:t>Einstiegsfrage: 'Welches Format führen Sie häufiger – Ziel- oder Steuerungsgespräch?' – 2–3 Antworten zulassen.</a:t>
+            </a:r>
+          </a:p>
+          <a:p>
+            <a:r>
+              <a:t>Flipchart-Nennungen aus Blitzlicht-Runde (0–15 Min.) hier aufgreifen.</a:t>
+            </a:r>
+          </a:p>
+          <a:p>
+            <a:r>
+              <a:t>Merksatz für Flipchart: 'Das Zielgespräch klärt, was erreicht werden soll. Das Steuerungsgespräch klärt, wie der Weg korrigiert werden kann.'</a:t>
             </a:r>
           </a:p>
         </p:txBody>
@@ -994,17 +919,12 @@
           <a:lstStyle/>
           <a:p>
             <a:r>
-              <a:t>Einstiegsfrage: 'Welches Format führen Sie häufiger – Ziel- oder Steuerungsgespräch?' – 2–3 Antworten zulassen.</a:t>
-            </a:r>
-          </a:p>
-          <a:p>
-            <a:r>
-              <a:t>Flipchart-Nennungen aus Blitzlicht-Runde (0–15 Min.) hier aufgreifen.</a:t>
-            </a:r>
-          </a:p>
-          <a:p>
-            <a:r>
-              <a:t>Merksatz für Flipchart: 'Das Zielgespräch klärt, was erreicht werden soll. Das Steuerungsgespräch klärt, wie der Weg korrigiert werden kann.'</a:t>
+              <a:t>Zeile 'Bezug zu TL04' bewusst weggelassen – das kennen alle aus dem Vorgänger-Modul.</a:t>
+            </a:r>
+          </a:p>
+          <a:p>
+            <a:r>
+              <a:t>Folgefrage: 'Was passiert, wenn Sie das Steuerungsgespräch führen, aber das Zielgespräch am Periodenbeginn nie klar war?'</a:t>
             </a:r>
           </a:p>
         </p:txBody>
@@ -1074,12 +994,12 @@
           <a:lstStyle/>
           <a:p>
             <a:r>
-              <a:t>Zeile 'Bezug zu TL04' bewusst weggelassen – das kennen alle aus dem Vorgänger-Modul.</a:t>
-            </a:r>
-          </a:p>
-          <a:p>
-            <a:r>
-              <a:t>Folgefrage: 'Was passiert, wenn Sie das Steuerungsgespräch führen, aber das Zielgespräch am Periodenbeginn nie klar war?'</a:t>
+              <a:t>Kritische Nachfrage antizipieren: 'Aber bei uns gibt es nichts zu vereinbaren – die Zahlen kommen von oben.' → Antwort: Ziel nicht verhandelbar, Weg sehr wohl.</a:t>
+            </a:r>
+          </a:p>
+          <a:p>
+            <a:r>
+              <a:t>Moderationsantwort auf diesen Einwand: 'Locke &amp; Latham zeigen: Partizipation beim Weg erhöht Zielbindung – auch bei vorgegebenen Zielen.'</a:t>
             </a:r>
           </a:p>
         </p:txBody>
@@ -1149,12 +1069,12 @@
           <a:lstStyle/>
           <a:p>
             <a:r>
-              <a:t>Kritische Nachfrage antizipieren: 'Aber bei uns gibt es nichts zu vereinbaren – die Zahlen kommen von oben.' → Antwort: Ziel nicht verhandelbar, Weg sehr wohl.</a:t>
-            </a:r>
-          </a:p>
-          <a:p>
-            <a:r>
-              <a:t>Moderationsantwort auf diesen Einwand: 'Locke &amp; Latham zeigen: Partizipation beim Weg erhöht Zielbindung – auch bei vorgegebenen Zielen.'</a:t>
+              <a:t>SMART-Aktivierungsfrage: 'Wer kennt SMART?' – fast alle. 'Wer hat in den letzten 6 Monaten ein SMART-Ziel mit einem Berater vereinbart?' – erheblich weniger.</a:t>
+            </a:r>
+          </a:p>
+          <a:p>
+            <a:r>
+              <a:t>Diese Diskrepanz zwischen Kenntnis und Anwendung ist der Einstieg in die kritische Einordnung.</a:t>
             </a:r>
           </a:p>
         </p:txBody>
@@ -1224,12 +1144,12 @@
           <a:lstStyle/>
           <a:p>
             <a:r>
-              <a:t>SMART-Aktivierungsfrage: 'Wer kennt SMART?' – fast alle. 'Wer hat in den letzten 6 Monaten ein SMART-Ziel mit einem Berater vereinbart?' – erheblich weniger.</a:t>
-            </a:r>
-          </a:p>
-          <a:p>
-            <a:r>
-              <a:t>Diese Diskrepanz zwischen Kenntnis und Anwendung ist der Einstieg in die kritische Einordnung.</a:t>
+              <a:t>Beispiel gemeinsam im Plenum entwickeln: Ein TN nennt ein aktuelles Ziel aus dem eigenen Team – gemeinsam SMART-Check machen.</a:t>
+            </a:r>
+          </a:p>
+          <a:p>
+            <a:r>
+              <a:t>Kritische Einordnung sofort anschließen: SMART für quantifizierbare Aktivitäten stark; für Beratungsqualität und Kundenbindung ergänzend qualitative Maßstäbe nötig (Watzka, 2014).</a:t>
             </a:r>
           </a:p>
         </p:txBody>
@@ -1299,12 +1219,17 @@
           <a:lstStyle/>
           <a:p>
             <a:r>
-              <a:t>Beispiel gemeinsam im Plenum entwickeln: Ein TN nennt ein aktuelles Ziel aus dem eigenen Team – gemeinsam SMART-Check machen.</a:t>
-            </a:r>
-          </a:p>
-          <a:p>
-            <a:r>
-              <a:t>Kritische Einordnung sofort anschließen: SMART für quantifizierbare Aktivitäten stark; für Beratungsqualität und Kundenbindung ergänzend qualitative Maßstäbe nötig (Watzka, 2014).</a:t>
+              <a:t>Quelle: Schreyögg &amp; Koch (2020): 'you get what you measure'.</a:t>
+            </a:r>
+          </a:p>
+          <a:p>
+            <a:r>
+              <a:t>Dieser Abschnitt schließt an TL04-Befunde zu dysfunktionaler Kennzahlensteuerung an – explizit benennen.</a:t>
+            </a:r>
+          </a:p>
+          <a:p>
+            <a:r>
+              <a:t>Formulierungshilfe: 'SMART ist ein nützliches Handwerkzeug, kein Erfolgsgarant. Wer nur misst, was er zählen kann, misst am Ende möglicherweise das Falsche.'</a:t>
             </a:r>
           </a:p>
         </p:txBody>
@@ -1374,17 +1299,12 @@
           <a:lstStyle/>
           <a:p>
             <a:r>
-              <a:t>Quelle: Schreyögg &amp; Koch (2020): 'you get what you measure'.</a:t>
-            </a:r>
-          </a:p>
-          <a:p>
-            <a:r>
-              <a:t>Dieser Abschnitt schließt an TL04-Befunde zu dysfunktionaler Kennzahlensteuerung an – explizit benennen.</a:t>
-            </a:r>
-          </a:p>
-          <a:p>
-            <a:r>
-              <a:t>Formulierungshilfe: 'SMART ist ein nützliches Handwerkzeug, kein Erfolgsgarant. Wer nur misst, was er zählen kann, misst am Ende möglicherweise das Falsche.'</a:t>
+              <a:t>Formulierungsbeispiel aus dem Modul vorlesen (Sec 4): 'Das Ziel ist gesetzt, und ich stehe dazu – auch wenn ich weiß, dass es ambitioniert ist. Lass uns besprechen, wie wir das gemeinsam angehen.'</a:t>
+            </a:r>
+          </a:p>
+          <a:p>
+            <a:r>
+              <a:t>Wichtig: Wenn Ziel für sachlich falsch gehalten → zuerst intern eskalieren, DANN Berater-Gespräch. Diese Reihenfolge klar benennen.</a:t>
             </a:r>
           </a:p>
         </p:txBody>
@@ -1454,12 +1374,22 @@
           <a:lstStyle/>
           <a:p>
             <a:r>
-              <a:t>Formulierungsbeispiel aus dem Modul vorlesen (Sec 4): 'Das Ziel ist gesetzt, und ich stehe dazu – auch wenn ich weiß, dass es ambitioniert ist. Lass uns besprechen, wie wir das gemeinsam angehen.'</a:t>
-            </a:r>
-          </a:p>
-          <a:p>
-            <a:r>
-              <a:t>Wichtig: Wenn Ziel für sachlich falsch gehalten → zuerst intern eskalieren, DANN Berater-Gespräch. Diese Reihenfolge klar benennen.</a:t>
+              <a:t>Timo-Szenario als Fallszenario (6 Monate, weit hinter Plan – noch nicht angesprochen).</a:t>
+            </a:r>
+          </a:p>
+          <a:p>
+            <a:r>
+              <a:t>Zwischenerinnerung nach 12 Min.: 'Prüfen Sie: Ist Ihr Einstiegssatz eine Frage oder eine Aussage?'</a:t>
+            </a:r>
+          </a:p>
+          <a:p>
+            <a:r>
+              <a:t>Nach Einzelarbeit: 2-Min.-Blitzauswertung im Plenum – ein TN nennt seine Kernhypothese.</a:t>
+            </a:r>
+          </a:p>
+          <a:p>
+            <a:r>
+              <a:t>Kollegiale Fallberatung (25 Min.) in 3–4er-Gruppen: Schritt 5 (schwierige Konstellation) gemeinsam bearbeiten. Timo-Szenario als Hauptfall planen – eigene Fälle als Bonus.</a:t>
             </a:r>
           </a:p>
         </p:txBody>
@@ -11979,7 +11909,7 @@
             <a:avLst/>
           </a:prstGeom>
           <a:solidFill>
-            <a:srgbClr val="EDEDF3"/>
+            <a:srgbClr val="1F2C56"/>
           </a:solidFill>
           <a:ln>
             <a:noFill/>
@@ -12015,129 +11945,8 @@
         </p:nvSpPr>
         <p:spPr>
           <a:xfrm>
-            <a:off x="0" y="0"/>
-            <a:ext cx="12188952" cy="50292"/>
-          </a:xfrm>
-          <a:prstGeom prst="rect">
-            <a:avLst/>
-          </a:prstGeom>
-          <a:solidFill>
-            <a:srgbClr val="1F2C56"/>
-          </a:solidFill>
-          <a:ln>
-            <a:noFill/>
-          </a:ln>
-        </p:spPr>
-        <p:style>
-          <a:lnRef idx="1">
-            <a:schemeClr val="accent1"/>
-          </a:lnRef>
-          <a:fillRef idx="3">
-            <a:schemeClr val="accent1"/>
-          </a:fillRef>
-          <a:effectRef idx="2">
-            <a:schemeClr val="accent1"/>
-          </a:effectRef>
-          <a:fontRef idx="minor">
-            <a:schemeClr val="lt1"/>
-          </a:fontRef>
-        </p:style>
-        <p:txBody>
-          <a:bodyPr rtlCol="0" anchor="ctr"/>
-          <a:lstStyle/>
-          <a:p>
-            <a:pPr algn="ctr"/>
-          </a:p>
-        </p:txBody>
-      </p:sp>
-      <p:sp>
-        <p:nvSpPr>
-          <p:cNvPr id="4" name="TextBox 3"/>
-          <p:cNvSpPr txBox="1"/>
-          <p:nvPr/>
-        </p:nvSpPr>
-        <p:spPr>
-          <a:xfrm>
-            <a:off x="685800" y="109728"/>
-            <a:ext cx="10817352" cy="228600"/>
-          </a:xfrm>
-          <a:prstGeom prst="rect">
-            <a:avLst/>
-          </a:prstGeom>
-          <a:noFill/>
-        </p:spPr>
-        <p:txBody>
-          <a:bodyPr wrap="none">
-            <a:spAutoFit/>
-          </a:bodyPr>
-          <a:lstStyle/>
-          <a:p>
-            <a:pPr algn="l"/>
-            <a:r>
-              <a:rPr sz="750">
-                <a:solidFill>
-                  <a:srgbClr val="78808C"/>
-                </a:solidFill>
-                <a:latin typeface="Consolas"/>
-              </a:rPr>
-              <a:t>TL05  ·  INHALT</a:t>
-            </a:r>
-          </a:p>
-        </p:txBody>
-      </p:sp>
-      <p:sp>
-        <p:nvSpPr>
-          <p:cNvPr id="5" name="Rectangle 4"/>
-          <p:cNvSpPr/>
-          <p:nvPr/>
-        </p:nvSpPr>
-        <p:spPr>
-          <a:xfrm>
-            <a:off x="0" y="1234440"/>
-            <a:ext cx="12188952" cy="12700"/>
-          </a:xfrm>
-          <a:prstGeom prst="rect">
-            <a:avLst/>
-          </a:prstGeom>
-          <a:solidFill>
-            <a:srgbClr val="D8DFE4"/>
-          </a:solidFill>
-          <a:ln>
-            <a:noFill/>
-          </a:ln>
-        </p:spPr>
-        <p:style>
-          <a:lnRef idx="1">
-            <a:schemeClr val="accent1"/>
-          </a:lnRef>
-          <a:fillRef idx="3">
-            <a:schemeClr val="accent1"/>
-          </a:fillRef>
-          <a:effectRef idx="2">
-            <a:schemeClr val="accent1"/>
-          </a:effectRef>
-          <a:fontRef idx="minor">
-            <a:schemeClr val="lt1"/>
-          </a:fontRef>
-        </p:style>
-        <p:txBody>
-          <a:bodyPr rtlCol="0" anchor="ctr"/>
-          <a:lstStyle/>
-          <a:p>
-            <a:pPr algn="ctr"/>
-          </a:p>
-        </p:txBody>
-      </p:sp>
-      <p:sp>
-        <p:nvSpPr>
-          <p:cNvPr id="6" name="Rectangle 5"/>
-          <p:cNvSpPr/>
-          <p:nvPr/>
-        </p:nvSpPr>
-        <p:spPr>
-          <a:xfrm>
-            <a:off x="685800" y="502920"/>
-            <a:ext cx="36576" cy="658368"/>
+            <a:off x="685800" y="2788920"/>
+            <a:ext cx="548640" cy="38100"/>
           </a:xfrm>
           <a:prstGeom prst="rect">
             <a:avLst/>
@@ -12173,14 +11982,14 @@
       </p:sp>
       <p:sp>
         <p:nvSpPr>
-          <p:cNvPr id="7" name="TextBox 6"/>
+          <p:cNvPr id="4" name="TextBox 3"/>
           <p:cNvSpPr txBox="1"/>
           <p:nvPr/>
         </p:nvSpPr>
         <p:spPr>
           <a:xfrm>
-            <a:off x="813816" y="502920"/>
-            <a:ext cx="10634472" cy="685800"/>
+            <a:off x="685800" y="3017520"/>
+            <a:ext cx="10817352" cy="1463040"/>
           </a:xfrm>
           <a:prstGeom prst="rect">
             <a:avLst/>
@@ -12195,9 +12004,9 @@
           <a:p>
             <a:pPr algn="l"/>
             <a:r>
-              <a:rPr sz="2400" b="1" i="0">
-                <a:solidFill>
-                  <a:srgbClr val="1F2C56"/>
+              <a:rPr sz="4000" b="1" i="0">
+                <a:solidFill>
+                  <a:srgbClr val="FFFFFF"/>
                 </a:solidFill>
                 <a:latin typeface="Arial"/>
               </a:rPr>
@@ -12208,57 +12017,49 @@
       </p:sp>
       <p:sp>
         <p:nvSpPr>
-          <p:cNvPr id="8" name="Rectangle 7"/>
-          <p:cNvSpPr/>
-          <p:nvPr/>
-        </p:nvSpPr>
-        <p:spPr>
-          <a:xfrm>
-            <a:off x="0" y="6510528"/>
-            <a:ext cx="12188952" cy="347472"/>
-          </a:xfrm>
-          <a:prstGeom prst="rect">
-            <a:avLst/>
-          </a:prstGeom>
-          <a:solidFill>
-            <a:srgbClr val="0A1937"/>
-          </a:solidFill>
-          <a:ln>
-            <a:noFill/>
-          </a:ln>
-        </p:spPr>
-        <p:style>
-          <a:lnRef idx="1">
-            <a:schemeClr val="accent1"/>
-          </a:lnRef>
-          <a:fillRef idx="3">
-            <a:schemeClr val="accent1"/>
-          </a:fillRef>
-          <a:effectRef idx="2">
-            <a:schemeClr val="accent1"/>
-          </a:effectRef>
-          <a:fontRef idx="minor">
-            <a:schemeClr val="lt1"/>
-          </a:fontRef>
-        </p:style>
-        <p:txBody>
-          <a:bodyPr rtlCol="0" anchor="ctr"/>
-          <a:lstStyle/>
-          <a:p>
-            <a:pPr algn="ctr"/>
-          </a:p>
-        </p:txBody>
-      </p:sp>
-      <p:sp>
-        <p:nvSpPr>
-          <p:cNvPr id="9" name="TextBox 8"/>
+          <p:cNvPr id="5" name="TextBox 4"/>
           <p:cNvSpPr txBox="1"/>
           <p:nvPr/>
         </p:nvSpPr>
         <p:spPr>
           <a:xfrm>
-            <a:off x="685800" y="6583680"/>
-            <a:ext cx="6490411" cy="256032"/>
+            <a:off x="685800" y="4480560"/>
+            <a:ext cx="8653881" cy="1280160"/>
+          </a:xfrm>
+          <a:prstGeom prst="rect">
+            <a:avLst/>
+          </a:prstGeom>
+          <a:noFill/>
+        </p:spPr>
+        <p:txBody>
+          <a:bodyPr wrap="square">
+            <a:spAutoFit/>
+          </a:bodyPr>
+          <a:lstStyle/>
+          <a:p>
+            <a:pPr algn="l"/>
+            <a:r>
+              <a:rPr sz="1600" b="0" i="0">
+                <a:solidFill>
+                  <a:srgbClr val="C8D2E6"/>
+                </a:solidFill>
+                <a:latin typeface="Arial"/>
+              </a:rPr>
+              <a:t>Zielgespräch oder Steuerungsgespräch – das ist keine Formfrage</a:t>
+            </a:r>
+          </a:p>
+        </p:txBody>
+      </p:sp>
+      <p:sp>
+        <p:nvSpPr>
+          <p:cNvPr id="6" name="TextBox 5"/>
+          <p:cNvSpPr txBox="1"/>
+          <p:nvPr/>
+        </p:nvSpPr>
+        <p:spPr>
+          <a:xfrm>
+            <a:off x="685800" y="6355080"/>
+            <a:ext cx="10817352" cy="274320"/>
           </a:xfrm>
           <a:prstGeom prst="rect">
             <a:avLst/>
@@ -12275,7 +12076,7 @@
             <a:r>
               <a:rPr sz="700">
                 <a:solidFill>
-                  <a:srgbClr val="A0B4D2"/>
+                  <a:srgbClr val="8CA0C3"/>
                 </a:solidFill>
                 <a:latin typeface="Consolas"/>
               </a:rPr>

--- a/protected-downloads/praesentation/TL05.pptx
+++ b/protected-downloads/praesentation/TL05.pptx
@@ -28,6 +28,7 @@
     <p:sldId id="276" r:id="rId28"/>
     <p:sldId id="277" r:id="rId29"/>
     <p:sldId id="278" r:id="rId30"/>
+    <p:sldId id="279" r:id="rId31"/>
   </p:sldIdLst>
   <p:sldSz cx="12188952" cy="6858000" type="screen4x3"/>
   <p:notesSz cx="6858000" cy="9144000"/>
@@ -594,22 +595,22 @@
           <a:lstStyle/>
           <a:p>
             <a:r>
-              <a:t>Sandra-Szenario: 8 Jahre FK, stärkste Abschlussquote, aber Anlassgespräche konstant halbiert (5 von Ziel 10). Halbjahres-Zielgespräch.</a:t>
-            </a:r>
-          </a:p>
-          <a:p>
-            <a:r>
-              <a:t>Sprachcheck-Instruktion: 'Wenn ich als Berater diesen Satz höre – will ich antworten und mitdenken, oder will ich mich verteidigen?' Kein Rollenspiel – es geht um den Text.</a:t>
-            </a:r>
-          </a:p>
-          <a:p>
-            <a:r>
-              <a:t>Zwischenerinnerung nach 10 Min.: Einstiegssatz muss drei Elemente enthalten: Stärke anerkennen, Entwicklungsfrage benennen, gemeinsame Arbeit einladen.</a:t>
-            </a:r>
-          </a:p>
-          <a:p>
-            <a:r>
-              <a:t>Plenum-Auswertung (205–215 Min.): Erste vs. zweite Version vergleichen – was hat der Sprachcheck konkret verändert?</a:t>
+              <a:t>Timo-Szenario als Fallszenario (6 Monate, weit hinter Plan – noch nicht angesprochen).</a:t>
+            </a:r>
+          </a:p>
+          <a:p>
+            <a:r>
+              <a:t>Zwischenerinnerung nach 12 Min.: 'Prüfen Sie: Ist Ihr Einstiegssatz eine Frage oder eine Aussage?'</a:t>
+            </a:r>
+          </a:p>
+          <a:p>
+            <a:r>
+              <a:t>Nach Einzelarbeit: 2-Min.-Blitzauswertung im Plenum – ein TN nennt seine Kernhypothese.</a:t>
+            </a:r>
+          </a:p>
+          <a:p>
+            <a:r>
+              <a:t>Kollegiale Fallberatung (25 Min.) in 3–4er-Gruppen: Schritt 5 (schwierige Konstellation) gemeinsam bearbeiten. Timo-Szenario als Hauptfall planen – eigene Fälle als Bonus.</a:t>
             </a:r>
           </a:p>
         </p:txBody>
@@ -679,17 +680,22 @@
           <a:lstStyle/>
           <a:p>
             <a:r>
-              <a:t>Selbstcheck (Sec 5) in Stille ausfüllen (4 Min.): Welche Frage ist die unbequemste?</a:t>
-            </a:r>
-          </a:p>
-          <a:p>
-            <a:r>
-              <a:t>Plenumsfrage: 'Was nehme ich heute Nachmittag mit – eine konkrete Handlung bis Ende dieser Woche?' Lassen Sie 2–3 TN antworten.</a:t>
-            </a:r>
-          </a:p>
-          <a:p>
-            <a:r>
-              <a:t>Transferaufgabe 3 besonders betonen: schwierige Konstellation aus dem eigenen Team – das ist der Brückenfall zu TL06.</a:t>
+              <a:t>Sandra-Szenario: 8 Jahre FK, stärkste Abschlussquote, aber Anlassgespräche konstant halbiert (5 von Ziel 10). Halbjahres-Zielgespräch.</a:t>
+            </a:r>
+          </a:p>
+          <a:p>
+            <a:r>
+              <a:t>Sprachcheck-Instruktion: 'Wenn ich als Berater diesen Satz höre – will ich antworten und mitdenken, oder will ich mich verteidigen?' Kein Rollenspiel – es geht um den Text.</a:t>
+            </a:r>
+          </a:p>
+          <a:p>
+            <a:r>
+              <a:t>Zwischenerinnerung nach 10 Min.: Einstiegssatz muss drei Elemente enthalten: Stärke anerkennen, Entwicklungsfrage benennen, gemeinsame Arbeit einladen.</a:t>
+            </a:r>
+          </a:p>
+          <a:p>
+            <a:r>
+              <a:t>Plenum-Auswertung (205–215 Min.): Erste vs. zweite Version vergleichen – was hat der Sprachcheck konkret verändert?</a:t>
             </a:r>
           </a:p>
         </p:txBody>
@@ -759,6 +765,86 @@
           <a:lstStyle/>
           <a:p>
             <a:r>
+              <a:t>Selbstcheck (Sec 5) in Stille ausfüllen (4 Min.): Welche Frage ist die unbequemste?</a:t>
+            </a:r>
+          </a:p>
+          <a:p>
+            <a:r>
+              <a:t>Plenumsfrage: 'Was nehme ich heute Nachmittag mit – eine konkrete Handlung bis Ende dieser Woche?' Lassen Sie 2–3 TN antworten.</a:t>
+            </a:r>
+          </a:p>
+          <a:p>
+            <a:r>
+              <a:t>Transferaufgabe 3 besonders betonen: schwierige Konstellation aus dem eigenen Team – das ist der Brückenfall zu TL06.</a:t>
+            </a:r>
+          </a:p>
+        </p:txBody>
+      </p:sp>
+      <p:sp>
+        <p:nvSpPr>
+          <p:cNvPr id="4" name="Slide Number Placeholder 3"/>
+          <p:cNvSpPr>
+            <a:spLocks noGrp="1"/>
+          </p:cNvSpPr>
+          <p:nvPr>
+            <p:ph type="sldNum" idx="5" sz="quarter"/>
+          </p:nvPr>
+        </p:nvSpPr>
+        <p:spPr/>
+      </p:sp>
+    </p:spTree>
+  </p:cSld>
+  <p:clrMapOvr>
+    <a:masterClrMapping/>
+  </p:clrMapOvr>
+</p:notes>
+</file>
+
+<file path=ppt/notesSlides/notesSlide13.xml><?xml version="1.0" encoding="utf-8"?>
+<p:notes xmlns:a="http://schemas.openxmlformats.org/drawingml/2006/main" xmlns:p="http://schemas.openxmlformats.org/presentationml/2006/main" xmlns:r="http://schemas.openxmlformats.org/officeDocument/2006/relationships">
+  <p:cSld>
+    <p:spTree>
+      <p:nvGrpSpPr>
+        <p:cNvPr id="1" name=""/>
+        <p:cNvGrpSpPr/>
+        <p:nvPr/>
+      </p:nvGrpSpPr>
+      <p:grpSpPr>
+        <a:xfrm>
+          <a:off x="0" y="0"/>
+          <a:ext cx="0" cy="0"/>
+          <a:chOff x="0" y="0"/>
+          <a:chExt cx="0" cy="0"/>
+        </a:xfrm>
+      </p:grpSpPr>
+      <p:sp>
+        <p:nvSpPr>
+          <p:cNvPr id="2" name="Slide Image Placeholder 1"/>
+          <p:cNvSpPr>
+            <a:spLocks noGrp="1"/>
+          </p:cNvSpPr>
+          <p:nvPr>
+            <p:ph type="sldImg" idx="2"/>
+          </p:nvPr>
+        </p:nvSpPr>
+        <p:spPr/>
+      </p:sp>
+      <p:sp>
+        <p:nvSpPr>
+          <p:cNvPr id="3" name="Notes Placeholder 2"/>
+          <p:cNvSpPr>
+            <a:spLocks noGrp="1"/>
+          </p:cNvSpPr>
+          <p:nvPr>
+            <p:ph type="body" idx="3" sz="quarter"/>
+          </p:nvPr>
+        </p:nvSpPr>
+        <p:spPr/>
+        <p:txBody>
+          <a:bodyPr/>
+          <a:lstStyle/>
+          <a:p>
+            <a:r>
               <a:t>Greenleaf (1977): 'Wachsen die Menschen, denen Sie führend begegnen?'</a:t>
             </a:r>
           </a:p>
@@ -1299,12 +1385,22 @@
           <a:lstStyle/>
           <a:p>
             <a:r>
-              <a:t>Formulierungsbeispiel aus dem Modul vorlesen (Sec 4): 'Das Ziel ist gesetzt, und ich stehe dazu – auch wenn ich weiß, dass es ambitioniert ist. Lass uns besprechen, wie wir das gemeinsam angehen.'</a:t>
-            </a:r>
-          </a:p>
-          <a:p>
-            <a:r>
-              <a:t>Wichtig: Wenn Ziel für sachlich falsch gehalten → zuerst intern eskalieren, DANN Berater-Gespräch. Diese Reihenfolge klar benennen.</a:t>
+              <a:t>TN lesen den Fall still (4 Min.), dann Plenumsfrage: 'Was macht dieses Gespräch schwieriger als ein normales Steuerungsgespräch?'</a:t>
+            </a:r>
+          </a:p>
+          <a:p>
+            <a:r>
+              <a:t>Lenkung auf drei Analysefragen: Was kann Kathrin ehrlich sagen? Was liegt in Markus' Gestaltungsbereich? Was braucht Markus von diesem Gespräch?</a:t>
+            </a:r>
+          </a:p>
+          <a:p>
+            <a:r>
+              <a:t>Stille nach 'Was würden Sie als Kathrin sagen?' aushalten – das ist der Lernort.</a:t>
+            </a:r>
+          </a:p>
+          <a:p>
+            <a:r>
+              <a:t>Häufigste Fehlantwort im Raum: Ziel relativieren oder 'realistisch nach unten verhandeln' → direkt eingreifen: Was wäre die Konsequenz für Kathrins Glaubwürdigkeit?</a:t>
             </a:r>
           </a:p>
         </p:txBody>
@@ -1374,22 +1470,12 @@
           <a:lstStyle/>
           <a:p>
             <a:r>
-              <a:t>Timo-Szenario als Fallszenario (6 Monate, weit hinter Plan – noch nicht angesprochen).</a:t>
-            </a:r>
-          </a:p>
-          <a:p>
-            <a:r>
-              <a:t>Zwischenerinnerung nach 12 Min.: 'Prüfen Sie: Ist Ihr Einstiegssatz eine Frage oder eine Aussage?'</a:t>
-            </a:r>
-          </a:p>
-          <a:p>
-            <a:r>
-              <a:t>Nach Einzelarbeit: 2-Min.-Blitzauswertung im Plenum – ein TN nennt seine Kernhypothese.</a:t>
-            </a:r>
-          </a:p>
-          <a:p>
-            <a:r>
-              <a:t>Kollegiale Fallberatung (25 Min.) in 3–4er-Gruppen: Schritt 5 (schwierige Konstellation) gemeinsam bearbeiten. Timo-Szenario als Hauptfall planen – eigene Fälle als Bonus.</a:t>
+              <a:t>Formulierungsbeispiel aus dem Modul vorlesen (Sec 4): 'Das Ziel ist gesetzt, und ich stehe dazu – auch wenn ich weiß, dass es ambitioniert ist. Lass uns besprechen, wie wir das gemeinsam angehen.'</a:t>
+            </a:r>
+          </a:p>
+          <a:p>
+            <a:r>
+              <a:t>Wichtig: Wenn Ziel für sachlich falsch gehalten → zuerst intern eskalieren, DANN Berater-Gespräch. Diese Reihenfolge klar benennen.</a:t>
             </a:r>
           </a:p>
         </p:txBody>
@@ -7287,7 +7373,7 @@
                 </a:solidFill>
                 <a:latin typeface="Consolas"/>
               </a:rPr>
-              <a:t>TL05  ·  INHALT</a:t>
+              <a:t>TL05  ·  PRAXISFALL</a:t>
             </a:r>
           </a:p>
         </p:txBody>
@@ -7408,21 +7494,109 @@
                 </a:solidFill>
                 <a:latin typeface="Arial"/>
               </a:rPr>
-              <a:t>Doppelte Loyalität – kein Dilemma, sondern eine Führungsaufgabe</a:t>
-            </a:r>
-          </a:p>
-        </p:txBody>
-      </p:sp>
-      <p:sp>
-        <p:nvSpPr>
-          <p:cNvPr id="8" name="TextBox 7"/>
+              <a:t>Teamleiterin Kathrin Bergmann – VR-Bank Musterregion eG</a:t>
+            </a:r>
+          </a:p>
+        </p:txBody>
+      </p:sp>
+      <p:sp>
+        <p:nvSpPr>
+          <p:cNvPr id="8" name="Rectangle 7"/>
+          <p:cNvSpPr/>
+          <p:nvPr/>
+        </p:nvSpPr>
+        <p:spPr>
+          <a:xfrm>
+            <a:off x="685800" y="1600200"/>
+            <a:ext cx="10817352" cy="1828800"/>
+          </a:xfrm>
+          <a:prstGeom prst="rect">
+            <a:avLst/>
+          </a:prstGeom>
+          <a:solidFill>
+            <a:srgbClr val="FFFFFF"/>
+          </a:solidFill>
+          <a:ln w="9525">
+            <a:solidFill>
+              <a:srgbClr val="D8DFE4"/>
+            </a:solidFill>
+          </a:ln>
+        </p:spPr>
+        <p:style>
+          <a:lnRef idx="1">
+            <a:schemeClr val="accent1"/>
+          </a:lnRef>
+          <a:fillRef idx="3">
+            <a:schemeClr val="accent1"/>
+          </a:fillRef>
+          <a:effectRef idx="2">
+            <a:schemeClr val="accent1"/>
+          </a:effectRef>
+          <a:fontRef idx="minor">
+            <a:schemeClr val="lt1"/>
+          </a:fontRef>
+        </p:style>
+        <p:txBody>
+          <a:bodyPr rtlCol="0" anchor="ctr"/>
+          <a:lstStyle/>
+          <a:p>
+            <a:pPr algn="ctr"/>
+          </a:p>
+        </p:txBody>
+      </p:sp>
+      <p:sp>
+        <p:nvSpPr>
+          <p:cNvPr id="9" name="Rectangle 8"/>
+          <p:cNvSpPr/>
+          <p:nvPr/>
+        </p:nvSpPr>
+        <p:spPr>
+          <a:xfrm>
+            <a:off x="685800" y="1600200"/>
+            <a:ext cx="36576" cy="1828800"/>
+          </a:xfrm>
+          <a:prstGeom prst="rect">
+            <a:avLst/>
+          </a:prstGeom>
+          <a:solidFill>
+            <a:srgbClr val="1F2C56"/>
+          </a:solidFill>
+          <a:ln>
+            <a:noFill/>
+          </a:ln>
+        </p:spPr>
+        <p:style>
+          <a:lnRef idx="1">
+            <a:schemeClr val="accent1"/>
+          </a:lnRef>
+          <a:fillRef idx="3">
+            <a:schemeClr val="accent1"/>
+          </a:fillRef>
+          <a:effectRef idx="2">
+            <a:schemeClr val="accent1"/>
+          </a:effectRef>
+          <a:fontRef idx="minor">
+            <a:schemeClr val="lt1"/>
+          </a:fontRef>
+        </p:style>
+        <p:txBody>
+          <a:bodyPr rtlCol="0" anchor="ctr"/>
+          <a:lstStyle/>
+          <a:p>
+            <a:pPr algn="ctr"/>
+          </a:p>
+        </p:txBody>
+      </p:sp>
+      <p:sp>
+        <p:nvSpPr>
+          <p:cNvPr id="10" name="TextBox 9"/>
           <p:cNvSpPr txBox="1"/>
           <p:nvPr/>
         </p:nvSpPr>
         <p:spPr>
           <a:xfrm>
-            <a:off x="685800" y="1417320"/>
-            <a:ext cx="10817352" cy="4892040"/>
+            <a:off x="941832" y="1783080"/>
+            <a:ext cx="10268712" cy="228600"/>
           </a:xfrm>
           <a:prstGeom prst="rect">
             <a:avLst/>
@@ -7430,110 +7604,67 @@
           <a:noFill/>
         </p:spPr>
         <p:txBody>
-          <a:bodyPr wrap="square" anchor="ctr">
+          <a:bodyPr wrap="none">
             <a:spAutoFit/>
           </a:bodyPr>
           <a:lstStyle/>
           <a:p>
-            <a:pPr marL="190500" indent="-190500">
-              <a:spcBef>
-                <a:spcPts val="400"/>
-              </a:spcBef>
+            <a:pPr algn="l"/>
+            <a:r>
+              <a:rPr sz="750">
+                <a:solidFill>
+                  <a:srgbClr val="78808C"/>
+                </a:solidFill>
+                <a:latin typeface="Consolas"/>
+              </a:rPr>
+              <a:t>AUSGANGSSITUATION</a:t>
+            </a:r>
+          </a:p>
+        </p:txBody>
+      </p:sp>
+      <p:sp>
+        <p:nvSpPr>
+          <p:cNvPr id="11" name="TextBox 10"/>
+          <p:cNvSpPr txBox="1"/>
+          <p:nvPr/>
+        </p:nvSpPr>
+        <p:spPr>
+          <a:xfrm>
+            <a:off x="941832" y="2084831"/>
+            <a:ext cx="7680960" cy="1188720"/>
+          </a:xfrm>
+          <a:prstGeom prst="rect">
+            <a:avLst/>
+          </a:prstGeom>
+          <a:noFill/>
+        </p:spPr>
+        <p:txBody>
+          <a:bodyPr wrap="square">
+            <a:spAutoFit/>
+          </a:bodyPr>
+          <a:lstStyle/>
+          <a:p>
+            <a:pPr>
               <a:spcAft>
-                <a:spcPts val="200"/>
+                <a:spcPts val="600"/>
               </a:spcAft>
             </a:pPr>
             <a:r>
-              <a:rPr sz="1300">
+              <a:rPr sz="1500">
                 <a:solidFill>
                   <a:srgbClr val="3D5466"/>
                 </a:solidFill>
                 <a:latin typeface="Arial"/>
               </a:rPr>
-              <a:t>▸  Schulden: Marktbereichsleitung → Ergebnisse.</a:t>
-            </a:r>
-          </a:p>
-          <a:p>
-            <a:pPr marL="190500" indent="-190500">
-              <a:spcBef>
-                <a:spcPts val="400"/>
-              </a:spcBef>
-              <a:spcAft>
-                <a:spcPts val="200"/>
-              </a:spcAft>
-            </a:pPr>
-            <a:r>
-              <a:rPr sz="1300">
-                <a:solidFill>
-                  <a:srgbClr val="3D5466"/>
-                </a:solidFill>
-                <a:latin typeface="Arial"/>
-              </a:rPr>
-              <a:t>▸  Schulden: Berater Markus → Führung.</a:t>
-            </a:r>
-          </a:p>
-          <a:p>
-            <a:pPr marL="190500" indent="-190500">
-              <a:spcBef>
-                <a:spcPts val="400"/>
-              </a:spcBef>
-              <a:spcAft>
-                <a:spcPts val="200"/>
-              </a:spcAft>
-            </a:pPr>
-            <a:r>
-              <a:rPr sz="1300">
-                <a:solidFill>
-                  <a:srgbClr val="3D5466"/>
-                </a:solidFill>
-                <a:latin typeface="Arial"/>
-              </a:rPr>
-              <a:t>▸  Schweigen: verliert Glaubwürdigkeit beim Berater.</a:t>
-            </a:r>
-          </a:p>
-          <a:p>
-            <a:pPr marL="190500" indent="-190500">
-              <a:spcBef>
-                <a:spcPts val="400"/>
-              </a:spcBef>
-              <a:spcAft>
-                <a:spcPts val="200"/>
-              </a:spcAft>
-            </a:pPr>
-            <a:r>
-              <a:rPr sz="1300">
-                <a:solidFill>
-                  <a:srgbClr val="3D5466"/>
-                </a:solidFill>
-                <a:latin typeface="Arial"/>
-              </a:rPr>
-              <a:t>▸  Relativieren: verliert Vertrauen bei der Bereichsleitung.</a:t>
-            </a:r>
-          </a:p>
-          <a:p>
-            <a:pPr marL="190500" indent="-190500">
-              <a:spcBef>
-                <a:spcPts val="400"/>
-              </a:spcBef>
-              <a:spcAft>
-                <a:spcPts val="200"/>
-              </a:spcAft>
-            </a:pPr>
-            <a:r>
-              <a:rPr sz="1300">
-                <a:solidFill>
-                  <a:srgbClr val="3D5466"/>
-                </a:solidFill>
-                <a:latin typeface="Arial"/>
-              </a:rPr>
-              <a:t>▸  Dritter Weg: Transparenz mit Kontext + gemeinsamer Weg.</a:t>
-            </a:r>
-          </a:p>
-        </p:txBody>
-      </p:sp>
-      <p:sp>
-        <p:nvSpPr>
-          <p:cNvPr id="9" name="Rectangle 8"/>
+              <a:t>Die Marktbereichsleitung hat die Jahresziele für alle FK-Teams um 12 % angehoben. Berater Markus liegt zur Halbzeit mit Abschlüssen, Volumen und Aktivitäten unter dem angepassten Plan. Kathrin muss das Gespräch führen – mit einem Ziel, hinter dem sie nur bedingt steht. Schweigen kostet Glaubwürdigkeit. Relativieren kostet Verbindlichkeit.
+</a:t>
+            </a:r>
+          </a:p>
+        </p:txBody>
+      </p:sp>
+      <p:sp>
+        <p:nvSpPr>
+          <p:cNvPr id="12" name="Rectangle 11"/>
           <p:cNvSpPr/>
           <p:nvPr/>
         </p:nvSpPr>
@@ -7576,7 +7707,7 @@
       </p:sp>
       <p:sp>
         <p:nvSpPr>
-          <p:cNvPr id="10" name="TextBox 9"/>
+          <p:cNvPr id="13" name="TextBox 12"/>
           <p:cNvSpPr txBox="1"/>
           <p:nvPr/>
         </p:nvSpPr>
@@ -7605,6 +7736,41 @@
                 <a:latin typeface="Consolas"/>
               </a:rPr>
               <a:t>FKB Campus  ·  TL05</a:t>
+            </a:r>
+          </a:p>
+        </p:txBody>
+      </p:sp>
+      <p:sp>
+        <p:nvSpPr>
+          <p:cNvPr id="14" name="TextBox 13"/>
+          <p:cNvSpPr txBox="1"/>
+          <p:nvPr/>
+        </p:nvSpPr>
+        <p:spPr>
+          <a:xfrm>
+            <a:off x="7176211" y="6583680"/>
+            <a:ext cx="4326940" cy="256032"/>
+          </a:xfrm>
+          <a:prstGeom prst="rect">
+            <a:avLst/>
+          </a:prstGeom>
+          <a:noFill/>
+        </p:spPr>
+        <p:txBody>
+          <a:bodyPr wrap="none">
+            <a:spAutoFit/>
+          </a:bodyPr>
+          <a:lstStyle/>
+          <a:p>
+            <a:pPr algn="r"/>
+            <a:r>
+              <a:rPr sz="700">
+                <a:solidFill>
+                  <a:srgbClr val="A0B4D2"/>
+                </a:solidFill>
+                <a:latin typeface="Consolas"/>
+              </a:rPr>
+              <a:t>Fall zuerst lesen</a:t>
             </a:r>
           </a:p>
         </p:txBody>
@@ -7642,6 +7808,49 @@
             <a:avLst/>
           </a:prstGeom>
           <a:solidFill>
+            <a:srgbClr val="EDEDF3"/>
+          </a:solidFill>
+          <a:ln>
+            <a:noFill/>
+          </a:ln>
+        </p:spPr>
+        <p:style>
+          <a:lnRef idx="1">
+            <a:schemeClr val="accent1"/>
+          </a:lnRef>
+          <a:fillRef idx="3">
+            <a:schemeClr val="accent1"/>
+          </a:fillRef>
+          <a:effectRef idx="2">
+            <a:schemeClr val="accent1"/>
+          </a:effectRef>
+          <a:fontRef idx="minor">
+            <a:schemeClr val="lt1"/>
+          </a:fontRef>
+        </p:style>
+        <p:txBody>
+          <a:bodyPr rtlCol="0" anchor="ctr"/>
+          <a:lstStyle/>
+          <a:p>
+            <a:pPr algn="ctr"/>
+          </a:p>
+        </p:txBody>
+      </p:sp>
+      <p:sp>
+        <p:nvSpPr>
+          <p:cNvPr id="3" name="Rectangle 2"/>
+          <p:cNvSpPr/>
+          <p:nvPr/>
+        </p:nvSpPr>
+        <p:spPr>
+          <a:xfrm>
+            <a:off x="0" y="0"/>
+            <a:ext cx="12188952" cy="50292"/>
+          </a:xfrm>
+          <a:prstGeom prst="rect">
+            <a:avLst/>
+          </a:prstGeom>
+          <a:solidFill>
             <a:srgbClr val="1F2C56"/>
           </a:solidFill>
           <a:ln>
@@ -7672,14 +7881,14 @@
       </p:sp>
       <p:sp>
         <p:nvSpPr>
-          <p:cNvPr id="3" name="TextBox 2"/>
+          <p:cNvPr id="4" name="TextBox 3"/>
           <p:cNvSpPr txBox="1"/>
           <p:nvPr/>
         </p:nvSpPr>
         <p:spPr>
           <a:xfrm>
-            <a:off x="685800" y="2377440"/>
-            <a:ext cx="10817352" cy="365760"/>
+            <a:off x="685800" y="109728"/>
+            <a:ext cx="10817352" cy="228600"/>
           </a:xfrm>
           <a:prstGeom prst="rect">
             <a:avLst/>
@@ -7694,27 +7903,70 @@
           <a:p>
             <a:pPr algn="l"/>
             <a:r>
-              <a:rPr sz="1200">
-                <a:solidFill>
-                  <a:srgbClr val="D9C089"/>
+              <a:rPr sz="750">
+                <a:solidFill>
+                  <a:srgbClr val="78808C"/>
                 </a:solidFill>
                 <a:latin typeface="Consolas"/>
               </a:rPr>
-              <a:t>EINZELARBEIT + KOLLEGIALE FALLBERATUNG (45 MIN.)</a:t>
-            </a:r>
-          </a:p>
-        </p:txBody>
-      </p:sp>
-      <p:sp>
-        <p:nvSpPr>
-          <p:cNvPr id="4" name="Rectangle 3"/>
+              <a:t>TL05  ·  INHALT</a:t>
+            </a:r>
+          </a:p>
+        </p:txBody>
+      </p:sp>
+      <p:sp>
+        <p:nvSpPr>
+          <p:cNvPr id="5" name="Rectangle 4"/>
           <p:cNvSpPr/>
           <p:nvPr/>
         </p:nvSpPr>
         <p:spPr>
           <a:xfrm>
-            <a:off x="685800" y="2788920"/>
-            <a:ext cx="548640" cy="38100"/>
+            <a:off x="0" y="1234440"/>
+            <a:ext cx="12188952" cy="12700"/>
+          </a:xfrm>
+          <a:prstGeom prst="rect">
+            <a:avLst/>
+          </a:prstGeom>
+          <a:solidFill>
+            <a:srgbClr val="D8DFE4"/>
+          </a:solidFill>
+          <a:ln>
+            <a:noFill/>
+          </a:ln>
+        </p:spPr>
+        <p:style>
+          <a:lnRef idx="1">
+            <a:schemeClr val="accent1"/>
+          </a:lnRef>
+          <a:fillRef idx="3">
+            <a:schemeClr val="accent1"/>
+          </a:fillRef>
+          <a:effectRef idx="2">
+            <a:schemeClr val="accent1"/>
+          </a:effectRef>
+          <a:fontRef idx="minor">
+            <a:schemeClr val="lt1"/>
+          </a:fontRef>
+        </p:style>
+        <p:txBody>
+          <a:bodyPr rtlCol="0" anchor="ctr"/>
+          <a:lstStyle/>
+          <a:p>
+            <a:pPr algn="ctr"/>
+          </a:p>
+        </p:txBody>
+      </p:sp>
+      <p:sp>
+        <p:nvSpPr>
+          <p:cNvPr id="6" name="Rectangle 5"/>
+          <p:cNvSpPr/>
+          <p:nvPr/>
+        </p:nvSpPr>
+        <p:spPr>
+          <a:xfrm>
+            <a:off x="685800" y="502920"/>
+            <a:ext cx="36576" cy="658368"/>
           </a:xfrm>
           <a:prstGeom prst="rect">
             <a:avLst/>
@@ -7750,14 +8002,14 @@
       </p:sp>
       <p:sp>
         <p:nvSpPr>
-          <p:cNvPr id="5" name="TextBox 4"/>
+          <p:cNvPr id="7" name="TextBox 6"/>
           <p:cNvSpPr txBox="1"/>
           <p:nvPr/>
         </p:nvSpPr>
         <p:spPr>
           <a:xfrm>
-            <a:off x="685800" y="3017520"/>
-            <a:ext cx="10817352" cy="1463040"/>
+            <a:off x="813816" y="502920"/>
+            <a:ext cx="10634472" cy="685800"/>
           </a:xfrm>
           <a:prstGeom prst="rect">
             <a:avLst/>
@@ -7772,27 +8024,27 @@
           <a:p>
             <a:pPr algn="l"/>
             <a:r>
-              <a:rPr sz="4000" b="1" i="0">
-                <a:solidFill>
-                  <a:srgbClr val="FFFFFF"/>
+              <a:rPr sz="2400" b="1" i="0">
+                <a:solidFill>
+                  <a:srgbClr val="1F2C56"/>
                 </a:solidFill>
                 <a:latin typeface="Arial"/>
               </a:rPr>
-              <a:t>AB-1: Gesprächsvorbereitung</a:t>
-            </a:r>
-          </a:p>
-        </p:txBody>
-      </p:sp>
-      <p:sp>
-        <p:nvSpPr>
-          <p:cNvPr id="6" name="TextBox 5"/>
+              <a:t>Doppelte Loyalität – kein Dilemma, sondern eine Führungsaufgabe</a:t>
+            </a:r>
+          </a:p>
+        </p:txBody>
+      </p:sp>
+      <p:sp>
+        <p:nvSpPr>
+          <p:cNvPr id="8" name="TextBox 7"/>
           <p:cNvSpPr txBox="1"/>
           <p:nvPr/>
         </p:nvSpPr>
         <p:spPr>
           <a:xfrm>
-            <a:off x="685800" y="4480560"/>
-            <a:ext cx="8653881" cy="1280160"/>
+            <a:off x="685800" y="1417320"/>
+            <a:ext cx="10817352" cy="4892040"/>
           </a:xfrm>
           <a:prstGeom prst="rect">
             <a:avLst/>
@@ -7800,34 +8052,160 @@
           <a:noFill/>
         </p:spPr>
         <p:txBody>
-          <a:bodyPr wrap="square">
+          <a:bodyPr wrap="square" anchor="ctr">
             <a:spAutoFit/>
           </a:bodyPr>
           <a:lstStyle/>
           <a:p>
-            <a:pPr algn="l"/>
-            <a:r>
-              <a:rPr sz="1600" b="0" i="0">
-                <a:solidFill>
-                  <a:srgbClr val="C8D2E6"/>
+            <a:pPr marL="190500" indent="-190500">
+              <a:spcBef>
+                <a:spcPts val="400"/>
+              </a:spcBef>
+              <a:spcAft>
+                <a:spcPts val="200"/>
+              </a:spcAft>
+            </a:pPr>
+            <a:r>
+              <a:rPr sz="1300">
+                <a:solidFill>
+                  <a:srgbClr val="3D5466"/>
                 </a:solidFill>
                 <a:latin typeface="Arial"/>
               </a:rPr>
-              <a:t>Cockpit-Hypothese → Gesprächsziel → Einstieg → schwierige Konstellation</a:t>
-            </a:r>
-          </a:p>
-        </p:txBody>
-      </p:sp>
-      <p:sp>
-        <p:nvSpPr>
-          <p:cNvPr id="7" name="TextBox 6"/>
+              <a:t>▸  Schulden: Marktbereichsleitung → Ergebnisse.</a:t>
+            </a:r>
+          </a:p>
+          <a:p>
+            <a:pPr marL="190500" indent="-190500">
+              <a:spcBef>
+                <a:spcPts val="400"/>
+              </a:spcBef>
+              <a:spcAft>
+                <a:spcPts val="200"/>
+              </a:spcAft>
+            </a:pPr>
+            <a:r>
+              <a:rPr sz="1300">
+                <a:solidFill>
+                  <a:srgbClr val="3D5466"/>
+                </a:solidFill>
+                <a:latin typeface="Arial"/>
+              </a:rPr>
+              <a:t>▸  Schulden: Berater Markus → Führung.</a:t>
+            </a:r>
+          </a:p>
+          <a:p>
+            <a:pPr marL="190500" indent="-190500">
+              <a:spcBef>
+                <a:spcPts val="400"/>
+              </a:spcBef>
+              <a:spcAft>
+                <a:spcPts val="200"/>
+              </a:spcAft>
+            </a:pPr>
+            <a:r>
+              <a:rPr sz="1300">
+                <a:solidFill>
+                  <a:srgbClr val="3D5466"/>
+                </a:solidFill>
+                <a:latin typeface="Arial"/>
+              </a:rPr>
+              <a:t>▸  Schweigen: verliert Glaubwürdigkeit beim Berater.</a:t>
+            </a:r>
+          </a:p>
+          <a:p>
+            <a:pPr marL="190500" indent="-190500">
+              <a:spcBef>
+                <a:spcPts val="400"/>
+              </a:spcBef>
+              <a:spcAft>
+                <a:spcPts val="200"/>
+              </a:spcAft>
+            </a:pPr>
+            <a:r>
+              <a:rPr sz="1300">
+                <a:solidFill>
+                  <a:srgbClr val="3D5466"/>
+                </a:solidFill>
+                <a:latin typeface="Arial"/>
+              </a:rPr>
+              <a:t>▸  Relativieren: verliert Vertrauen bei der Bereichsleitung.</a:t>
+            </a:r>
+          </a:p>
+          <a:p>
+            <a:pPr marL="190500" indent="-190500">
+              <a:spcBef>
+                <a:spcPts val="400"/>
+              </a:spcBef>
+              <a:spcAft>
+                <a:spcPts val="200"/>
+              </a:spcAft>
+            </a:pPr>
+            <a:r>
+              <a:rPr sz="1300">
+                <a:solidFill>
+                  <a:srgbClr val="3D5466"/>
+                </a:solidFill>
+                <a:latin typeface="Arial"/>
+              </a:rPr>
+              <a:t>▸  Dritter Weg: Transparenz mit Kontext + gemeinsamer Weg.</a:t>
+            </a:r>
+          </a:p>
+        </p:txBody>
+      </p:sp>
+      <p:sp>
+        <p:nvSpPr>
+          <p:cNvPr id="9" name="Rectangle 8"/>
+          <p:cNvSpPr/>
+          <p:nvPr/>
+        </p:nvSpPr>
+        <p:spPr>
+          <a:xfrm>
+            <a:off x="0" y="6510528"/>
+            <a:ext cx="12188952" cy="347472"/>
+          </a:xfrm>
+          <a:prstGeom prst="rect">
+            <a:avLst/>
+          </a:prstGeom>
+          <a:solidFill>
+            <a:srgbClr val="0A1937"/>
+          </a:solidFill>
+          <a:ln>
+            <a:noFill/>
+          </a:ln>
+        </p:spPr>
+        <p:style>
+          <a:lnRef idx="1">
+            <a:schemeClr val="accent1"/>
+          </a:lnRef>
+          <a:fillRef idx="3">
+            <a:schemeClr val="accent1"/>
+          </a:fillRef>
+          <a:effectRef idx="2">
+            <a:schemeClr val="accent1"/>
+          </a:effectRef>
+          <a:fontRef idx="minor">
+            <a:schemeClr val="lt1"/>
+          </a:fontRef>
+        </p:style>
+        <p:txBody>
+          <a:bodyPr rtlCol="0" anchor="ctr"/>
+          <a:lstStyle/>
+          <a:p>
+            <a:pPr algn="ctr"/>
+          </a:p>
+        </p:txBody>
+      </p:sp>
+      <p:sp>
+        <p:nvSpPr>
+          <p:cNvPr id="10" name="TextBox 9"/>
           <p:cNvSpPr txBox="1"/>
           <p:nvPr/>
         </p:nvSpPr>
         <p:spPr>
           <a:xfrm>
-            <a:off x="685800" y="6355080"/>
-            <a:ext cx="10817352" cy="274320"/>
+            <a:off x="685800" y="6583680"/>
+            <a:ext cx="6490411" cy="256032"/>
           </a:xfrm>
           <a:prstGeom prst="rect">
             <a:avLst/>
@@ -7844,7 +8222,7 @@
             <a:r>
               <a:rPr sz="700">
                 <a:solidFill>
-                  <a:srgbClr val="8CA0C3"/>
+                  <a:srgbClr val="A0B4D2"/>
                 </a:solidFill>
                 <a:latin typeface="Consolas"/>
               </a:rPr>
@@ -7886,7 +8264,7 @@
             <a:avLst/>
           </a:prstGeom>
           <a:solidFill>
-            <a:srgbClr val="EDEDF3"/>
+            <a:srgbClr val="1F2C56"/>
           </a:solidFill>
           <a:ln>
             <a:noFill/>
@@ -7916,57 +8294,14 @@
       </p:sp>
       <p:sp>
         <p:nvSpPr>
-          <p:cNvPr id="3" name="Rectangle 2"/>
-          <p:cNvSpPr/>
-          <p:nvPr/>
-        </p:nvSpPr>
-        <p:spPr>
-          <a:xfrm>
-            <a:off x="0" y="0"/>
-            <a:ext cx="12188952" cy="50292"/>
-          </a:xfrm>
-          <a:prstGeom prst="rect">
-            <a:avLst/>
-          </a:prstGeom>
-          <a:solidFill>
-            <a:srgbClr val="1F2C56"/>
-          </a:solidFill>
-          <a:ln>
-            <a:noFill/>
-          </a:ln>
-        </p:spPr>
-        <p:style>
-          <a:lnRef idx="1">
-            <a:schemeClr val="accent1"/>
-          </a:lnRef>
-          <a:fillRef idx="3">
-            <a:schemeClr val="accent1"/>
-          </a:fillRef>
-          <a:effectRef idx="2">
-            <a:schemeClr val="accent1"/>
-          </a:effectRef>
-          <a:fontRef idx="minor">
-            <a:schemeClr val="lt1"/>
-          </a:fontRef>
-        </p:style>
-        <p:txBody>
-          <a:bodyPr rtlCol="0" anchor="ctr"/>
-          <a:lstStyle/>
-          <a:p>
-            <a:pPr algn="ctr"/>
-          </a:p>
-        </p:txBody>
-      </p:sp>
-      <p:sp>
-        <p:nvSpPr>
-          <p:cNvPr id="4" name="TextBox 3"/>
+          <p:cNvPr id="3" name="TextBox 2"/>
           <p:cNvSpPr txBox="1"/>
           <p:nvPr/>
         </p:nvSpPr>
         <p:spPr>
           <a:xfrm>
-            <a:off x="685800" y="109728"/>
-            <a:ext cx="10817352" cy="228600"/>
+            <a:off x="685800" y="2377440"/>
+            <a:ext cx="10817352" cy="365760"/>
           </a:xfrm>
           <a:prstGeom prst="rect">
             <a:avLst/>
@@ -7981,70 +8316,27 @@
           <a:p>
             <a:pPr algn="l"/>
             <a:r>
-              <a:rPr sz="750">
-                <a:solidFill>
-                  <a:srgbClr val="78808C"/>
+              <a:rPr sz="1200">
+                <a:solidFill>
+                  <a:srgbClr val="D9C089"/>
                 </a:solidFill>
                 <a:latin typeface="Consolas"/>
               </a:rPr>
-              <a:t>TL05  ·  ARBEITSBLATT</a:t>
-            </a:r>
-          </a:p>
-        </p:txBody>
-      </p:sp>
-      <p:sp>
-        <p:nvSpPr>
-          <p:cNvPr id="5" name="Rectangle 4"/>
+              <a:t>EINZELARBEIT + KOLLEGIALE FALLBERATUNG (45 MIN.)</a:t>
+            </a:r>
+          </a:p>
+        </p:txBody>
+      </p:sp>
+      <p:sp>
+        <p:nvSpPr>
+          <p:cNvPr id="4" name="Rectangle 3"/>
           <p:cNvSpPr/>
           <p:nvPr/>
         </p:nvSpPr>
         <p:spPr>
           <a:xfrm>
-            <a:off x="0" y="1234440"/>
-            <a:ext cx="12188952" cy="12700"/>
-          </a:xfrm>
-          <a:prstGeom prst="rect">
-            <a:avLst/>
-          </a:prstGeom>
-          <a:solidFill>
-            <a:srgbClr val="D8DFE4"/>
-          </a:solidFill>
-          <a:ln>
-            <a:noFill/>
-          </a:ln>
-        </p:spPr>
-        <p:style>
-          <a:lnRef idx="1">
-            <a:schemeClr val="accent1"/>
-          </a:lnRef>
-          <a:fillRef idx="3">
-            <a:schemeClr val="accent1"/>
-          </a:fillRef>
-          <a:effectRef idx="2">
-            <a:schemeClr val="accent1"/>
-          </a:effectRef>
-          <a:fontRef idx="minor">
-            <a:schemeClr val="lt1"/>
-          </a:fontRef>
-        </p:style>
-        <p:txBody>
-          <a:bodyPr rtlCol="0" anchor="ctr"/>
-          <a:lstStyle/>
-          <a:p>
-            <a:pPr algn="ctr"/>
-          </a:p>
-        </p:txBody>
-      </p:sp>
-      <p:sp>
-        <p:nvSpPr>
-          <p:cNvPr id="6" name="Rectangle 5"/>
-          <p:cNvSpPr/>
-          <p:nvPr/>
-        </p:nvSpPr>
-        <p:spPr>
-          <a:xfrm>
-            <a:off x="685800" y="502920"/>
-            <a:ext cx="36576" cy="658368"/>
+            <a:off x="685800" y="2788920"/>
+            <a:ext cx="548640" cy="38100"/>
           </a:xfrm>
           <a:prstGeom prst="rect">
             <a:avLst/>
@@ -8080,14 +8372,14 @@
       </p:sp>
       <p:sp>
         <p:nvSpPr>
-          <p:cNvPr id="7" name="TextBox 6"/>
+          <p:cNvPr id="5" name="TextBox 4"/>
           <p:cNvSpPr txBox="1"/>
           <p:nvPr/>
         </p:nvSpPr>
         <p:spPr>
           <a:xfrm>
-            <a:off x="813816" y="502920"/>
-            <a:ext cx="10634472" cy="685800"/>
+            <a:off x="685800" y="3017520"/>
+            <a:ext cx="10817352" cy="1463040"/>
           </a:xfrm>
           <a:prstGeom prst="rect">
             <a:avLst/>
@@ -8102,27 +8394,27 @@
           <a:p>
             <a:pPr algn="l"/>
             <a:r>
-              <a:rPr sz="2400" b="1" i="0">
-                <a:solidFill>
-                  <a:srgbClr val="1F2C56"/>
+              <a:rPr sz="4000" b="1" i="0">
+                <a:solidFill>
+                  <a:srgbClr val="FFFFFF"/>
                 </a:solidFill>
                 <a:latin typeface="Arial"/>
               </a:rPr>
-              <a:t>AB-1: Ein Gespräch vorbereiten – Schritt für Schritt</a:t>
-            </a:r>
-          </a:p>
-        </p:txBody>
-      </p:sp>
-      <p:sp>
-        <p:nvSpPr>
-          <p:cNvPr id="8" name="TextBox 7"/>
+              <a:t>AB-1: Gesprächsvorbereitung</a:t>
+            </a:r>
+          </a:p>
+        </p:txBody>
+      </p:sp>
+      <p:sp>
+        <p:nvSpPr>
+          <p:cNvPr id="6" name="TextBox 5"/>
           <p:cNvSpPr txBox="1"/>
           <p:nvPr/>
         </p:nvSpPr>
         <p:spPr>
           <a:xfrm>
-            <a:off x="685800" y="1554480"/>
-            <a:ext cx="10817352" cy="3840480"/>
+            <a:off x="685800" y="4480560"/>
+            <a:ext cx="8653881" cy="1280160"/>
           </a:xfrm>
           <a:prstGeom prst="rect">
             <a:avLst/>
@@ -8135,233 +8427,29 @@
           </a:bodyPr>
           <a:lstStyle/>
           <a:p>
-            <a:pPr marL="190500" indent="-190500">
-              <a:spcBef>
-                <a:spcPts val="400"/>
-              </a:spcBef>
-              <a:spcAft>
-                <a:spcPts val="200"/>
-              </a:spcAft>
-            </a:pPr>
-            <a:r>
-              <a:rPr sz="1400">
-                <a:solidFill>
-                  <a:srgbClr val="3D5466"/>
+            <a:pPr algn="l"/>
+            <a:r>
+              <a:rPr sz="1600" b="0" i="0">
+                <a:solidFill>
+                  <a:srgbClr val="C8D2E6"/>
                 </a:solidFill>
                 <a:latin typeface="Arial"/>
               </a:rPr>
-              <a:t>▸  Schritt 1: Kennzahlenmuster bestimmen + min. 2 Hypothesen.</a:t>
-            </a:r>
-          </a:p>
-          <a:p>
-            <a:pPr marL="190500" indent="-190500">
-              <a:spcBef>
-                <a:spcPts val="400"/>
-              </a:spcBef>
-              <a:spcAft>
-                <a:spcPts val="200"/>
-              </a:spcAft>
-            </a:pPr>
-            <a:r>
-              <a:rPr sz="1400">
-                <a:solidFill>
-                  <a:srgbClr val="3D5466"/>
-                </a:solidFill>
-                <a:latin typeface="Arial"/>
-              </a:rPr>
-              <a:t>▸  Schritt 2: Format klären – Steuerungs- oder Zielgespräch?</a:t>
-            </a:r>
-          </a:p>
-          <a:p>
-            <a:pPr marL="190500" indent="-190500">
-              <a:spcBef>
-                <a:spcPts val="400"/>
-              </a:spcBef>
-              <a:spcAft>
-                <a:spcPts val="200"/>
-              </a:spcAft>
-            </a:pPr>
-            <a:r>
-              <a:rPr sz="1400">
-                <a:solidFill>
-                  <a:srgbClr val="3D5466"/>
-                </a:solidFill>
-                <a:latin typeface="Arial"/>
-              </a:rPr>
-              <a:t>▸  Schritt 3: Gesprächsziel steuerbar formulieren.</a:t>
-            </a:r>
-          </a:p>
-          <a:p>
-            <a:pPr marL="190500" indent="-190500">
-              <a:spcBef>
-                <a:spcPts val="400"/>
-              </a:spcBef>
-              <a:spcAft>
-                <a:spcPts val="200"/>
-              </a:spcAft>
-            </a:pPr>
-            <a:r>
-              <a:rPr sz="1400">
-                <a:solidFill>
-                  <a:srgbClr val="3D5466"/>
-                </a:solidFill>
-                <a:latin typeface="Arial"/>
-              </a:rPr>
-              <a:t>▸  Schritt 4: Einstiegssatz + SMART-Teilziel für Q3.</a:t>
-            </a:r>
-          </a:p>
-          <a:p>
-            <a:pPr marL="190500" indent="-190500">
-              <a:spcBef>
-                <a:spcPts val="400"/>
-              </a:spcBef>
-              <a:spcAft>
-                <a:spcPts val="200"/>
-              </a:spcAft>
-            </a:pPr>
-            <a:r>
-              <a:rPr sz="1400">
-                <a:solidFill>
-                  <a:srgbClr val="3D5466"/>
-                </a:solidFill>
-                <a:latin typeface="Arial"/>
-              </a:rPr>
-              <a:t>▸  Schritt 5: Zwei schwierige Berater-Reaktionen antizipieren.</a:t>
-            </a:r>
-          </a:p>
-        </p:txBody>
-      </p:sp>
-      <p:sp>
-        <p:nvSpPr>
-          <p:cNvPr id="9" name="Rectangle 8"/>
-          <p:cNvSpPr/>
-          <p:nvPr/>
-        </p:nvSpPr>
-        <p:spPr>
-          <a:xfrm>
-            <a:off x="685800" y="5486400"/>
-            <a:ext cx="10817352" cy="640080"/>
-          </a:xfrm>
-          <a:prstGeom prst="rect">
-            <a:avLst/>
-          </a:prstGeom>
-          <a:solidFill>
-            <a:srgbClr val="1F2C56"/>
-          </a:solidFill>
-          <a:ln>
-            <a:noFill/>
-          </a:ln>
-        </p:spPr>
-        <p:style>
-          <a:lnRef idx="1">
-            <a:schemeClr val="accent1"/>
-          </a:lnRef>
-          <a:fillRef idx="3">
-            <a:schemeClr val="accent1"/>
-          </a:fillRef>
-          <a:effectRef idx="2">
-            <a:schemeClr val="accent1"/>
-          </a:effectRef>
-          <a:fontRef idx="minor">
-            <a:schemeClr val="lt1"/>
-          </a:fontRef>
-        </p:style>
-        <p:txBody>
-          <a:bodyPr rtlCol="0" anchor="ctr"/>
-          <a:lstStyle/>
-          <a:p>
-            <a:pPr algn="ctr"/>
-          </a:p>
-        </p:txBody>
-      </p:sp>
-      <p:sp>
-        <p:nvSpPr>
-          <p:cNvPr id="10" name="TextBox 9"/>
+              <a:t>Cockpit-Hypothese → Gesprächsziel → Einstieg → schwierige Konstellation</a:t>
+            </a:r>
+          </a:p>
+        </p:txBody>
+      </p:sp>
+      <p:sp>
+        <p:nvSpPr>
+          <p:cNvPr id="7" name="TextBox 6"/>
           <p:cNvSpPr txBox="1"/>
           <p:nvPr/>
         </p:nvSpPr>
         <p:spPr>
           <a:xfrm>
-            <a:off x="868680" y="5596128"/>
-            <a:ext cx="10451592" cy="457200"/>
-          </a:xfrm>
-          <a:prstGeom prst="rect">
-            <a:avLst/>
-          </a:prstGeom>
-          <a:noFill/>
-        </p:spPr>
-        <p:txBody>
-          <a:bodyPr wrap="square">
-            <a:spAutoFit/>
-          </a:bodyPr>
-          <a:lstStyle/>
-          <a:p>
-            <a:pPr algn="l"/>
-            <a:r>
-              <a:rPr sz="1300" b="1" i="0">
-                <a:solidFill>
-                  <a:srgbClr val="FFFFFF"/>
-                </a:solidFill>
-                <a:latin typeface="Arial"/>
-              </a:rPr>
-              <a:t>→  Bearbeitung im Teilnehmer-Workbook (Arbeitsblatt mit Ausfüllfeldern)</a:t>
-            </a:r>
-          </a:p>
-        </p:txBody>
-      </p:sp>
-      <p:sp>
-        <p:nvSpPr>
-          <p:cNvPr id="11" name="Rectangle 10"/>
-          <p:cNvSpPr/>
-          <p:nvPr/>
-        </p:nvSpPr>
-        <p:spPr>
-          <a:xfrm>
-            <a:off x="0" y="6510528"/>
-            <a:ext cx="12188952" cy="347472"/>
-          </a:xfrm>
-          <a:prstGeom prst="rect">
-            <a:avLst/>
-          </a:prstGeom>
-          <a:solidFill>
-            <a:srgbClr val="0A1937"/>
-          </a:solidFill>
-          <a:ln>
-            <a:noFill/>
-          </a:ln>
-        </p:spPr>
-        <p:style>
-          <a:lnRef idx="1">
-            <a:schemeClr val="accent1"/>
-          </a:lnRef>
-          <a:fillRef idx="3">
-            <a:schemeClr val="accent1"/>
-          </a:fillRef>
-          <a:effectRef idx="2">
-            <a:schemeClr val="accent1"/>
-          </a:effectRef>
-          <a:fontRef idx="minor">
-            <a:schemeClr val="lt1"/>
-          </a:fontRef>
-        </p:style>
-        <p:txBody>
-          <a:bodyPr rtlCol="0" anchor="ctr"/>
-          <a:lstStyle/>
-          <a:p>
-            <a:pPr algn="ctr"/>
-          </a:p>
-        </p:txBody>
-      </p:sp>
-      <p:sp>
-        <p:nvSpPr>
-          <p:cNvPr id="12" name="TextBox 11"/>
-          <p:cNvSpPr txBox="1"/>
-          <p:nvPr/>
-        </p:nvSpPr>
-        <p:spPr>
-          <a:xfrm>
-            <a:off x="685800" y="6583680"/>
-            <a:ext cx="6490411" cy="256032"/>
+            <a:off x="685800" y="6355080"/>
+            <a:ext cx="10817352" cy="274320"/>
           </a:xfrm>
           <a:prstGeom prst="rect">
             <a:avLst/>
@@ -8378,7 +8466,7 @@
             <a:r>
               <a:rPr sz="700">
                 <a:solidFill>
-                  <a:srgbClr val="A0B4D2"/>
+                  <a:srgbClr val="8CA0C3"/>
                 </a:solidFill>
                 <a:latin typeface="Consolas"/>
               </a:rPr>
@@ -8420,6 +8508,49 @@
             <a:avLst/>
           </a:prstGeom>
           <a:solidFill>
+            <a:srgbClr val="EDEDF3"/>
+          </a:solidFill>
+          <a:ln>
+            <a:noFill/>
+          </a:ln>
+        </p:spPr>
+        <p:style>
+          <a:lnRef idx="1">
+            <a:schemeClr val="accent1"/>
+          </a:lnRef>
+          <a:fillRef idx="3">
+            <a:schemeClr val="accent1"/>
+          </a:fillRef>
+          <a:effectRef idx="2">
+            <a:schemeClr val="accent1"/>
+          </a:effectRef>
+          <a:fontRef idx="minor">
+            <a:schemeClr val="lt1"/>
+          </a:fontRef>
+        </p:style>
+        <p:txBody>
+          <a:bodyPr rtlCol="0" anchor="ctr"/>
+          <a:lstStyle/>
+          <a:p>
+            <a:pPr algn="ctr"/>
+          </a:p>
+        </p:txBody>
+      </p:sp>
+      <p:sp>
+        <p:nvSpPr>
+          <p:cNvPr id="3" name="Rectangle 2"/>
+          <p:cNvSpPr/>
+          <p:nvPr/>
+        </p:nvSpPr>
+        <p:spPr>
+          <a:xfrm>
+            <a:off x="0" y="0"/>
+            <a:ext cx="12188952" cy="50292"/>
+          </a:xfrm>
+          <a:prstGeom prst="rect">
+            <a:avLst/>
+          </a:prstGeom>
+          <a:solidFill>
             <a:srgbClr val="1F2C56"/>
           </a:solidFill>
           <a:ln>
@@ -8450,14 +8581,14 @@
       </p:sp>
       <p:sp>
         <p:nvSpPr>
-          <p:cNvPr id="3" name="TextBox 2"/>
+          <p:cNvPr id="4" name="TextBox 3"/>
           <p:cNvSpPr txBox="1"/>
           <p:nvPr/>
         </p:nvSpPr>
         <p:spPr>
           <a:xfrm>
-            <a:off x="685800" y="2377440"/>
-            <a:ext cx="10817352" cy="365760"/>
+            <a:off x="685800" y="109728"/>
+            <a:ext cx="10817352" cy="228600"/>
           </a:xfrm>
           <a:prstGeom prst="rect">
             <a:avLst/>
@@ -8472,27 +8603,70 @@
           <a:p>
             <a:pPr algn="l"/>
             <a:r>
-              <a:rPr sz="1200">
-                <a:solidFill>
-                  <a:srgbClr val="D9C089"/>
+              <a:rPr sz="750">
+                <a:solidFill>
+                  <a:srgbClr val="78808C"/>
                 </a:solidFill>
                 <a:latin typeface="Consolas"/>
               </a:rPr>
-              <a:t>EINZELARBEIT + SPRACHCHECK (40 MIN.)</a:t>
-            </a:r>
-          </a:p>
-        </p:txBody>
-      </p:sp>
-      <p:sp>
-        <p:nvSpPr>
-          <p:cNvPr id="4" name="Rectangle 3"/>
+              <a:t>TL05  ·  ARBEITSBLATT</a:t>
+            </a:r>
+          </a:p>
+        </p:txBody>
+      </p:sp>
+      <p:sp>
+        <p:nvSpPr>
+          <p:cNvPr id="5" name="Rectangle 4"/>
           <p:cNvSpPr/>
           <p:nvPr/>
         </p:nvSpPr>
         <p:spPr>
           <a:xfrm>
-            <a:off x="685800" y="2788920"/>
-            <a:ext cx="548640" cy="38100"/>
+            <a:off x="0" y="1234440"/>
+            <a:ext cx="12188952" cy="12700"/>
+          </a:xfrm>
+          <a:prstGeom prst="rect">
+            <a:avLst/>
+          </a:prstGeom>
+          <a:solidFill>
+            <a:srgbClr val="D8DFE4"/>
+          </a:solidFill>
+          <a:ln>
+            <a:noFill/>
+          </a:ln>
+        </p:spPr>
+        <p:style>
+          <a:lnRef idx="1">
+            <a:schemeClr val="accent1"/>
+          </a:lnRef>
+          <a:fillRef idx="3">
+            <a:schemeClr val="accent1"/>
+          </a:fillRef>
+          <a:effectRef idx="2">
+            <a:schemeClr val="accent1"/>
+          </a:effectRef>
+          <a:fontRef idx="minor">
+            <a:schemeClr val="lt1"/>
+          </a:fontRef>
+        </p:style>
+        <p:txBody>
+          <a:bodyPr rtlCol="0" anchor="ctr"/>
+          <a:lstStyle/>
+          <a:p>
+            <a:pPr algn="ctr"/>
+          </a:p>
+        </p:txBody>
+      </p:sp>
+      <p:sp>
+        <p:nvSpPr>
+          <p:cNvPr id="6" name="Rectangle 5"/>
+          <p:cNvSpPr/>
+          <p:nvPr/>
+        </p:nvSpPr>
+        <p:spPr>
+          <a:xfrm>
+            <a:off x="685800" y="502920"/>
+            <a:ext cx="36576" cy="658368"/>
           </a:xfrm>
           <a:prstGeom prst="rect">
             <a:avLst/>
@@ -8528,14 +8702,14 @@
       </p:sp>
       <p:sp>
         <p:nvSpPr>
-          <p:cNvPr id="5" name="TextBox 4"/>
+          <p:cNvPr id="7" name="TextBox 6"/>
           <p:cNvSpPr txBox="1"/>
           <p:nvPr/>
         </p:nvSpPr>
         <p:spPr>
           <a:xfrm>
-            <a:off x="685800" y="3017520"/>
-            <a:ext cx="10817352" cy="1463040"/>
+            <a:off x="813816" y="502920"/>
+            <a:ext cx="10634472" cy="685800"/>
           </a:xfrm>
           <a:prstGeom prst="rect">
             <a:avLst/>
@@ -8550,27 +8724,27 @@
           <a:p>
             <a:pPr algn="l"/>
             <a:r>
-              <a:rPr sz="4000" b="1" i="0">
-                <a:solidFill>
-                  <a:srgbClr val="FFFFFF"/>
+              <a:rPr sz="2400" b="1" i="0">
+                <a:solidFill>
+                  <a:srgbClr val="1F2C56"/>
                 </a:solidFill>
                 <a:latin typeface="Arial"/>
               </a:rPr>
-              <a:t>AB-2: SMART-Zielformulierung &amp; Gesprächseinstieg</a:t>
-            </a:r>
-          </a:p>
-        </p:txBody>
-      </p:sp>
-      <p:sp>
-        <p:nvSpPr>
-          <p:cNvPr id="6" name="TextBox 5"/>
+              <a:t>AB-1: Ein Gespräch vorbereiten – Schritt für Schritt</a:t>
+            </a:r>
+          </a:p>
+        </p:txBody>
+      </p:sp>
+      <p:sp>
+        <p:nvSpPr>
+          <p:cNvPr id="8" name="TextBox 7"/>
           <p:cNvSpPr txBox="1"/>
           <p:nvPr/>
         </p:nvSpPr>
         <p:spPr>
           <a:xfrm>
-            <a:off x="685800" y="4480560"/>
-            <a:ext cx="8653881" cy="1280160"/>
+            <a:off x="685800" y="1554480"/>
+            <a:ext cx="10817352" cy="3840480"/>
           </a:xfrm>
           <a:prstGeom prst="rect">
             <a:avLst/>
@@ -8583,29 +8757,233 @@
           </a:bodyPr>
           <a:lstStyle/>
           <a:p>
+            <a:pPr marL="190500" indent="-190500">
+              <a:spcBef>
+                <a:spcPts val="400"/>
+              </a:spcBef>
+              <a:spcAft>
+                <a:spcPts val="200"/>
+              </a:spcAft>
+            </a:pPr>
+            <a:r>
+              <a:rPr sz="1400">
+                <a:solidFill>
+                  <a:srgbClr val="3D5466"/>
+                </a:solidFill>
+                <a:latin typeface="Arial"/>
+              </a:rPr>
+              <a:t>▸  Schritt 1: Kennzahlenmuster bestimmen + min. 2 Hypothesen.</a:t>
+            </a:r>
+          </a:p>
+          <a:p>
+            <a:pPr marL="190500" indent="-190500">
+              <a:spcBef>
+                <a:spcPts val="400"/>
+              </a:spcBef>
+              <a:spcAft>
+                <a:spcPts val="200"/>
+              </a:spcAft>
+            </a:pPr>
+            <a:r>
+              <a:rPr sz="1400">
+                <a:solidFill>
+                  <a:srgbClr val="3D5466"/>
+                </a:solidFill>
+                <a:latin typeface="Arial"/>
+              </a:rPr>
+              <a:t>▸  Schritt 2: Format klären – Steuerungs- oder Zielgespräch?</a:t>
+            </a:r>
+          </a:p>
+          <a:p>
+            <a:pPr marL="190500" indent="-190500">
+              <a:spcBef>
+                <a:spcPts val="400"/>
+              </a:spcBef>
+              <a:spcAft>
+                <a:spcPts val="200"/>
+              </a:spcAft>
+            </a:pPr>
+            <a:r>
+              <a:rPr sz="1400">
+                <a:solidFill>
+                  <a:srgbClr val="3D5466"/>
+                </a:solidFill>
+                <a:latin typeface="Arial"/>
+              </a:rPr>
+              <a:t>▸  Schritt 3: Gesprächsziel steuerbar formulieren.</a:t>
+            </a:r>
+          </a:p>
+          <a:p>
+            <a:pPr marL="190500" indent="-190500">
+              <a:spcBef>
+                <a:spcPts val="400"/>
+              </a:spcBef>
+              <a:spcAft>
+                <a:spcPts val="200"/>
+              </a:spcAft>
+            </a:pPr>
+            <a:r>
+              <a:rPr sz="1400">
+                <a:solidFill>
+                  <a:srgbClr val="3D5466"/>
+                </a:solidFill>
+                <a:latin typeface="Arial"/>
+              </a:rPr>
+              <a:t>▸  Schritt 4: Einstiegssatz + SMART-Teilziel für Q3.</a:t>
+            </a:r>
+          </a:p>
+          <a:p>
+            <a:pPr marL="190500" indent="-190500">
+              <a:spcBef>
+                <a:spcPts val="400"/>
+              </a:spcBef>
+              <a:spcAft>
+                <a:spcPts val="200"/>
+              </a:spcAft>
+            </a:pPr>
+            <a:r>
+              <a:rPr sz="1400">
+                <a:solidFill>
+                  <a:srgbClr val="3D5466"/>
+                </a:solidFill>
+                <a:latin typeface="Arial"/>
+              </a:rPr>
+              <a:t>▸  Schritt 5: Zwei schwierige Berater-Reaktionen antizipieren.</a:t>
+            </a:r>
+          </a:p>
+        </p:txBody>
+      </p:sp>
+      <p:sp>
+        <p:nvSpPr>
+          <p:cNvPr id="9" name="Rectangle 8"/>
+          <p:cNvSpPr/>
+          <p:nvPr/>
+        </p:nvSpPr>
+        <p:spPr>
+          <a:xfrm>
+            <a:off x="685800" y="5486400"/>
+            <a:ext cx="10817352" cy="640080"/>
+          </a:xfrm>
+          <a:prstGeom prst="rect">
+            <a:avLst/>
+          </a:prstGeom>
+          <a:solidFill>
+            <a:srgbClr val="1F2C56"/>
+          </a:solidFill>
+          <a:ln>
+            <a:noFill/>
+          </a:ln>
+        </p:spPr>
+        <p:style>
+          <a:lnRef idx="1">
+            <a:schemeClr val="accent1"/>
+          </a:lnRef>
+          <a:fillRef idx="3">
+            <a:schemeClr val="accent1"/>
+          </a:fillRef>
+          <a:effectRef idx="2">
+            <a:schemeClr val="accent1"/>
+          </a:effectRef>
+          <a:fontRef idx="minor">
+            <a:schemeClr val="lt1"/>
+          </a:fontRef>
+        </p:style>
+        <p:txBody>
+          <a:bodyPr rtlCol="0" anchor="ctr"/>
+          <a:lstStyle/>
+          <a:p>
+            <a:pPr algn="ctr"/>
+          </a:p>
+        </p:txBody>
+      </p:sp>
+      <p:sp>
+        <p:nvSpPr>
+          <p:cNvPr id="10" name="TextBox 9"/>
+          <p:cNvSpPr txBox="1"/>
+          <p:nvPr/>
+        </p:nvSpPr>
+        <p:spPr>
+          <a:xfrm>
+            <a:off x="868680" y="5596128"/>
+            <a:ext cx="10451592" cy="457200"/>
+          </a:xfrm>
+          <a:prstGeom prst="rect">
+            <a:avLst/>
+          </a:prstGeom>
+          <a:noFill/>
+        </p:spPr>
+        <p:txBody>
+          <a:bodyPr wrap="square">
+            <a:spAutoFit/>
+          </a:bodyPr>
+          <a:lstStyle/>
+          <a:p>
             <a:pPr algn="l"/>
             <a:r>
-              <a:rPr sz="1600" b="0" i="0">
-                <a:solidFill>
-                  <a:srgbClr val="C8D2E6"/>
+              <a:rPr sz="1300" b="1" i="0">
+                <a:solidFill>
+                  <a:srgbClr val="FFFFFF"/>
                 </a:solidFill>
                 <a:latin typeface="Arial"/>
               </a:rPr>
-              <a:t>Partizipativen Gesprächseinstieg entwickeln und im Sprachcheck prüfen</a:t>
-            </a:r>
-          </a:p>
-        </p:txBody>
-      </p:sp>
-      <p:sp>
-        <p:nvSpPr>
-          <p:cNvPr id="7" name="TextBox 6"/>
+              <a:t>→  Bearbeitung im Teilnehmer-Workbook (Arbeitsblatt mit Ausfüllfeldern)</a:t>
+            </a:r>
+          </a:p>
+        </p:txBody>
+      </p:sp>
+      <p:sp>
+        <p:nvSpPr>
+          <p:cNvPr id="11" name="Rectangle 10"/>
+          <p:cNvSpPr/>
+          <p:nvPr/>
+        </p:nvSpPr>
+        <p:spPr>
+          <a:xfrm>
+            <a:off x="0" y="6510528"/>
+            <a:ext cx="12188952" cy="347472"/>
+          </a:xfrm>
+          <a:prstGeom prst="rect">
+            <a:avLst/>
+          </a:prstGeom>
+          <a:solidFill>
+            <a:srgbClr val="0A1937"/>
+          </a:solidFill>
+          <a:ln>
+            <a:noFill/>
+          </a:ln>
+        </p:spPr>
+        <p:style>
+          <a:lnRef idx="1">
+            <a:schemeClr val="accent1"/>
+          </a:lnRef>
+          <a:fillRef idx="3">
+            <a:schemeClr val="accent1"/>
+          </a:fillRef>
+          <a:effectRef idx="2">
+            <a:schemeClr val="accent1"/>
+          </a:effectRef>
+          <a:fontRef idx="minor">
+            <a:schemeClr val="lt1"/>
+          </a:fontRef>
+        </p:style>
+        <p:txBody>
+          <a:bodyPr rtlCol="0" anchor="ctr"/>
+          <a:lstStyle/>
+          <a:p>
+            <a:pPr algn="ctr"/>
+          </a:p>
+        </p:txBody>
+      </p:sp>
+      <p:sp>
+        <p:nvSpPr>
+          <p:cNvPr id="12" name="TextBox 11"/>
           <p:cNvSpPr txBox="1"/>
           <p:nvPr/>
         </p:nvSpPr>
         <p:spPr>
           <a:xfrm>
-            <a:off x="685800" y="6355080"/>
-            <a:ext cx="10817352" cy="274320"/>
+            <a:off x="685800" y="6583680"/>
+            <a:ext cx="6490411" cy="256032"/>
           </a:xfrm>
           <a:prstGeom prst="rect">
             <a:avLst/>
@@ -8622,7 +9000,7 @@
             <a:r>
               <a:rPr sz="700">
                 <a:solidFill>
-                  <a:srgbClr val="8CA0C3"/>
+                  <a:srgbClr val="A0B4D2"/>
                 </a:solidFill>
                 <a:latin typeface="Consolas"/>
               </a:rPr>
@@ -9046,7 +9424,7 @@
             <a:avLst/>
           </a:prstGeom>
           <a:solidFill>
-            <a:srgbClr val="EDEDF3"/>
+            <a:srgbClr val="1F2C56"/>
           </a:solidFill>
           <a:ln>
             <a:noFill/>
@@ -9076,57 +9454,14 @@
       </p:sp>
       <p:sp>
         <p:nvSpPr>
-          <p:cNvPr id="3" name="Rectangle 2"/>
-          <p:cNvSpPr/>
-          <p:nvPr/>
-        </p:nvSpPr>
-        <p:spPr>
-          <a:xfrm>
-            <a:off x="0" y="0"/>
-            <a:ext cx="12188952" cy="50292"/>
-          </a:xfrm>
-          <a:prstGeom prst="rect">
-            <a:avLst/>
-          </a:prstGeom>
-          <a:solidFill>
-            <a:srgbClr val="1F2C56"/>
-          </a:solidFill>
-          <a:ln>
-            <a:noFill/>
-          </a:ln>
-        </p:spPr>
-        <p:style>
-          <a:lnRef idx="1">
-            <a:schemeClr val="accent1"/>
-          </a:lnRef>
-          <a:fillRef idx="3">
-            <a:schemeClr val="accent1"/>
-          </a:fillRef>
-          <a:effectRef idx="2">
-            <a:schemeClr val="accent1"/>
-          </a:effectRef>
-          <a:fontRef idx="minor">
-            <a:schemeClr val="lt1"/>
-          </a:fontRef>
-        </p:style>
-        <p:txBody>
-          <a:bodyPr rtlCol="0" anchor="ctr"/>
-          <a:lstStyle/>
-          <a:p>
-            <a:pPr algn="ctr"/>
-          </a:p>
-        </p:txBody>
-      </p:sp>
-      <p:sp>
-        <p:nvSpPr>
-          <p:cNvPr id="4" name="TextBox 3"/>
+          <p:cNvPr id="3" name="TextBox 2"/>
           <p:cNvSpPr txBox="1"/>
           <p:nvPr/>
         </p:nvSpPr>
         <p:spPr>
           <a:xfrm>
-            <a:off x="685800" y="109728"/>
-            <a:ext cx="10817352" cy="228600"/>
+            <a:off x="685800" y="2377440"/>
+            <a:ext cx="10817352" cy="365760"/>
           </a:xfrm>
           <a:prstGeom prst="rect">
             <a:avLst/>
@@ -9141,70 +9476,27 @@
           <a:p>
             <a:pPr algn="l"/>
             <a:r>
-              <a:rPr sz="750">
-                <a:solidFill>
-                  <a:srgbClr val="78808C"/>
+              <a:rPr sz="1200">
+                <a:solidFill>
+                  <a:srgbClr val="D9C089"/>
                 </a:solidFill>
                 <a:latin typeface="Consolas"/>
               </a:rPr>
-              <a:t>TL05  ·  ARBEITSBLATT</a:t>
-            </a:r>
-          </a:p>
-        </p:txBody>
-      </p:sp>
-      <p:sp>
-        <p:nvSpPr>
-          <p:cNvPr id="5" name="Rectangle 4"/>
+              <a:t>EINZELARBEIT + SPRACHCHECK (40 MIN.)</a:t>
+            </a:r>
+          </a:p>
+        </p:txBody>
+      </p:sp>
+      <p:sp>
+        <p:nvSpPr>
+          <p:cNvPr id="4" name="Rectangle 3"/>
           <p:cNvSpPr/>
           <p:nvPr/>
         </p:nvSpPr>
         <p:spPr>
           <a:xfrm>
-            <a:off x="0" y="1234440"/>
-            <a:ext cx="12188952" cy="12700"/>
-          </a:xfrm>
-          <a:prstGeom prst="rect">
-            <a:avLst/>
-          </a:prstGeom>
-          <a:solidFill>
-            <a:srgbClr val="D8DFE4"/>
-          </a:solidFill>
-          <a:ln>
-            <a:noFill/>
-          </a:ln>
-        </p:spPr>
-        <p:style>
-          <a:lnRef idx="1">
-            <a:schemeClr val="accent1"/>
-          </a:lnRef>
-          <a:fillRef idx="3">
-            <a:schemeClr val="accent1"/>
-          </a:fillRef>
-          <a:effectRef idx="2">
-            <a:schemeClr val="accent1"/>
-          </a:effectRef>
-          <a:fontRef idx="minor">
-            <a:schemeClr val="lt1"/>
-          </a:fontRef>
-        </p:style>
-        <p:txBody>
-          <a:bodyPr rtlCol="0" anchor="ctr"/>
-          <a:lstStyle/>
-          <a:p>
-            <a:pPr algn="ctr"/>
-          </a:p>
-        </p:txBody>
-      </p:sp>
-      <p:sp>
-        <p:nvSpPr>
-          <p:cNvPr id="6" name="Rectangle 5"/>
-          <p:cNvSpPr/>
-          <p:nvPr/>
-        </p:nvSpPr>
-        <p:spPr>
-          <a:xfrm>
-            <a:off x="685800" y="502920"/>
-            <a:ext cx="36576" cy="658368"/>
+            <a:off x="685800" y="2788920"/>
+            <a:ext cx="548640" cy="38100"/>
           </a:xfrm>
           <a:prstGeom prst="rect">
             <a:avLst/>
@@ -9240,14 +9532,14 @@
       </p:sp>
       <p:sp>
         <p:nvSpPr>
-          <p:cNvPr id="7" name="TextBox 6"/>
+          <p:cNvPr id="5" name="TextBox 4"/>
           <p:cNvSpPr txBox="1"/>
           <p:nvPr/>
         </p:nvSpPr>
         <p:spPr>
           <a:xfrm>
-            <a:off x="813816" y="502920"/>
-            <a:ext cx="10634472" cy="685800"/>
+            <a:off x="685800" y="3017520"/>
+            <a:ext cx="10817352" cy="1463040"/>
           </a:xfrm>
           <a:prstGeom prst="rect">
             <a:avLst/>
@@ -9262,27 +9554,27 @@
           <a:p>
             <a:pPr algn="l"/>
             <a:r>
-              <a:rPr sz="2400" b="1" i="0">
-                <a:solidFill>
-                  <a:srgbClr val="1F2C56"/>
+              <a:rPr sz="4000" b="1" i="0">
+                <a:solidFill>
+                  <a:srgbClr val="FFFFFF"/>
                 </a:solidFill>
                 <a:latin typeface="Arial"/>
               </a:rPr>
-              <a:t>AB-2: Formulieren – nicht proben, sondern schreiben</a:t>
-            </a:r>
-          </a:p>
-        </p:txBody>
-      </p:sp>
-      <p:sp>
-        <p:nvSpPr>
-          <p:cNvPr id="8" name="TextBox 7"/>
+              <a:t>AB-2: SMART-Zielformulierung &amp; Gesprächseinstieg</a:t>
+            </a:r>
+          </a:p>
+        </p:txBody>
+      </p:sp>
+      <p:sp>
+        <p:nvSpPr>
+          <p:cNvPr id="6" name="TextBox 5"/>
           <p:cNvSpPr txBox="1"/>
           <p:nvPr/>
         </p:nvSpPr>
         <p:spPr>
           <a:xfrm>
-            <a:off x="685800" y="1554480"/>
-            <a:ext cx="10817352" cy="3840480"/>
+            <a:off x="685800" y="4480560"/>
+            <a:ext cx="8653881" cy="1280160"/>
           </a:xfrm>
           <a:prstGeom prst="rect">
             <a:avLst/>
@@ -9295,233 +9587,29 @@
           </a:bodyPr>
           <a:lstStyle/>
           <a:p>
-            <a:pPr marL="190500" indent="-190500">
-              <a:spcBef>
-                <a:spcPts val="400"/>
-              </a:spcBef>
-              <a:spcAft>
-                <a:spcPts val="200"/>
-              </a:spcAft>
-            </a:pPr>
-            <a:r>
-              <a:rPr sz="1400">
-                <a:solidFill>
-                  <a:srgbClr val="3D5466"/>
+            <a:pPr algn="l"/>
+            <a:r>
+              <a:rPr sz="1600" b="0" i="0">
+                <a:solidFill>
+                  <a:srgbClr val="C8D2E6"/>
                 </a:solidFill>
                 <a:latin typeface="Arial"/>
               </a:rPr>
-              <a:t>▸  Schritt 1: Halbjahresziel für Sandra SMART formulieren.</a:t>
-            </a:r>
-          </a:p>
-          <a:p>
-            <a:pPr marL="190500" indent="-190500">
-              <a:spcBef>
-                <a:spcPts val="400"/>
-              </a:spcBef>
-              <a:spcAft>
-                <a:spcPts val="200"/>
-              </a:spcAft>
-            </a:pPr>
-            <a:r>
-              <a:rPr sz="1400">
-                <a:solidFill>
-                  <a:srgbClr val="3D5466"/>
-                </a:solidFill>
-                <a:latin typeface="Arial"/>
-              </a:rPr>
-              <a:t>▸  Schritt 2: Zwei partizipative Fragen entwickeln.</a:t>
-            </a:r>
-          </a:p>
-          <a:p>
-            <a:pPr marL="190500" indent="-190500">
-              <a:spcBef>
-                <a:spcPts val="400"/>
-              </a:spcBef>
-              <a:spcAft>
-                <a:spcPts val="200"/>
-              </a:spcAft>
-            </a:pPr>
-            <a:r>
-              <a:rPr sz="1400">
-                <a:solidFill>
-                  <a:srgbClr val="3D5466"/>
-                </a:solidFill>
-                <a:latin typeface="Arial"/>
-              </a:rPr>
-              <a:t>▸  Schritt 3: Einstiegssatz – Stärke, Entwicklungsfrage, Einladung.</a:t>
-            </a:r>
-          </a:p>
-          <a:p>
-            <a:pPr marL="190500" indent="-190500">
-              <a:spcBef>
-                <a:spcPts val="400"/>
-              </a:spcBef>
-              <a:spcAft>
-                <a:spcPts val="200"/>
-              </a:spcAft>
-            </a:pPr>
-            <a:r>
-              <a:rPr sz="1400">
-                <a:solidFill>
-                  <a:srgbClr val="3D5466"/>
-                </a:solidFill>
-                <a:latin typeface="Arial"/>
-              </a:rPr>
-              <a:t>▸  Schritt 4: Sprachcheck in 2er-Gruppen – aus Mitarbeiterperspektive.</a:t>
-            </a:r>
-          </a:p>
-          <a:p>
-            <a:pPr marL="190500" indent="-190500">
-              <a:spcBef>
-                <a:spcPts val="400"/>
-              </a:spcBef>
-              <a:spcAft>
-                <a:spcPts val="200"/>
-              </a:spcAft>
-            </a:pPr>
-            <a:r>
-              <a:rPr sz="1400">
-                <a:solidFill>
-                  <a:srgbClr val="3D5466"/>
-                </a:solidFill>
-                <a:latin typeface="Arial"/>
-              </a:rPr>
-              <a:t>▸  Schritt 5: Zweite Version des Einstiegssatzes schreiben.</a:t>
-            </a:r>
-          </a:p>
-        </p:txBody>
-      </p:sp>
-      <p:sp>
-        <p:nvSpPr>
-          <p:cNvPr id="9" name="Rectangle 8"/>
-          <p:cNvSpPr/>
-          <p:nvPr/>
-        </p:nvSpPr>
-        <p:spPr>
-          <a:xfrm>
-            <a:off x="685800" y="5486400"/>
-            <a:ext cx="10817352" cy="640080"/>
-          </a:xfrm>
-          <a:prstGeom prst="rect">
-            <a:avLst/>
-          </a:prstGeom>
-          <a:solidFill>
-            <a:srgbClr val="1F2C56"/>
-          </a:solidFill>
-          <a:ln>
-            <a:noFill/>
-          </a:ln>
-        </p:spPr>
-        <p:style>
-          <a:lnRef idx="1">
-            <a:schemeClr val="accent1"/>
-          </a:lnRef>
-          <a:fillRef idx="3">
-            <a:schemeClr val="accent1"/>
-          </a:fillRef>
-          <a:effectRef idx="2">
-            <a:schemeClr val="accent1"/>
-          </a:effectRef>
-          <a:fontRef idx="minor">
-            <a:schemeClr val="lt1"/>
-          </a:fontRef>
-        </p:style>
-        <p:txBody>
-          <a:bodyPr rtlCol="0" anchor="ctr"/>
-          <a:lstStyle/>
-          <a:p>
-            <a:pPr algn="ctr"/>
-          </a:p>
-        </p:txBody>
-      </p:sp>
-      <p:sp>
-        <p:nvSpPr>
-          <p:cNvPr id="10" name="TextBox 9"/>
+              <a:t>Partizipativen Gesprächseinstieg entwickeln und im Sprachcheck prüfen</a:t>
+            </a:r>
+          </a:p>
+        </p:txBody>
+      </p:sp>
+      <p:sp>
+        <p:nvSpPr>
+          <p:cNvPr id="7" name="TextBox 6"/>
           <p:cNvSpPr txBox="1"/>
           <p:nvPr/>
         </p:nvSpPr>
         <p:spPr>
           <a:xfrm>
-            <a:off x="868680" y="5596128"/>
-            <a:ext cx="10451592" cy="457200"/>
-          </a:xfrm>
-          <a:prstGeom prst="rect">
-            <a:avLst/>
-          </a:prstGeom>
-          <a:noFill/>
-        </p:spPr>
-        <p:txBody>
-          <a:bodyPr wrap="square">
-            <a:spAutoFit/>
-          </a:bodyPr>
-          <a:lstStyle/>
-          <a:p>
-            <a:pPr algn="l"/>
-            <a:r>
-              <a:rPr sz="1300" b="1" i="0">
-                <a:solidFill>
-                  <a:srgbClr val="FFFFFF"/>
-                </a:solidFill>
-                <a:latin typeface="Arial"/>
-              </a:rPr>
-              <a:t>→  Bearbeitung im Teilnehmer-Workbook (Arbeitsblatt mit Ausfüllfeldern)</a:t>
-            </a:r>
-          </a:p>
-        </p:txBody>
-      </p:sp>
-      <p:sp>
-        <p:nvSpPr>
-          <p:cNvPr id="11" name="Rectangle 10"/>
-          <p:cNvSpPr/>
-          <p:nvPr/>
-        </p:nvSpPr>
-        <p:spPr>
-          <a:xfrm>
-            <a:off x="0" y="6510528"/>
-            <a:ext cx="12188952" cy="347472"/>
-          </a:xfrm>
-          <a:prstGeom prst="rect">
-            <a:avLst/>
-          </a:prstGeom>
-          <a:solidFill>
-            <a:srgbClr val="0A1937"/>
-          </a:solidFill>
-          <a:ln>
-            <a:noFill/>
-          </a:ln>
-        </p:spPr>
-        <p:style>
-          <a:lnRef idx="1">
-            <a:schemeClr val="accent1"/>
-          </a:lnRef>
-          <a:fillRef idx="3">
-            <a:schemeClr val="accent1"/>
-          </a:fillRef>
-          <a:effectRef idx="2">
-            <a:schemeClr val="accent1"/>
-          </a:effectRef>
-          <a:fontRef idx="minor">
-            <a:schemeClr val="lt1"/>
-          </a:fontRef>
-        </p:style>
-        <p:txBody>
-          <a:bodyPr rtlCol="0" anchor="ctr"/>
-          <a:lstStyle/>
-          <a:p>
-            <a:pPr algn="ctr"/>
-          </a:p>
-        </p:txBody>
-      </p:sp>
-      <p:sp>
-        <p:nvSpPr>
-          <p:cNvPr id="12" name="TextBox 11"/>
-          <p:cNvSpPr txBox="1"/>
-          <p:nvPr/>
-        </p:nvSpPr>
-        <p:spPr>
-          <a:xfrm>
-            <a:off x="685800" y="6583680"/>
-            <a:ext cx="6490411" cy="256032"/>
+            <a:off x="685800" y="6355080"/>
+            <a:ext cx="10817352" cy="274320"/>
           </a:xfrm>
           <a:prstGeom prst="rect">
             <a:avLst/>
@@ -9538,7 +9626,7 @@
             <a:r>
               <a:rPr sz="700">
                 <a:solidFill>
-                  <a:srgbClr val="A0B4D2"/>
+                  <a:srgbClr val="8CA0C3"/>
                 </a:solidFill>
                 <a:latin typeface="Consolas"/>
               </a:rPr>
@@ -9580,6 +9668,49 @@
             <a:avLst/>
           </a:prstGeom>
           <a:solidFill>
+            <a:srgbClr val="EDEDF3"/>
+          </a:solidFill>
+          <a:ln>
+            <a:noFill/>
+          </a:ln>
+        </p:spPr>
+        <p:style>
+          <a:lnRef idx="1">
+            <a:schemeClr val="accent1"/>
+          </a:lnRef>
+          <a:fillRef idx="3">
+            <a:schemeClr val="accent1"/>
+          </a:fillRef>
+          <a:effectRef idx="2">
+            <a:schemeClr val="accent1"/>
+          </a:effectRef>
+          <a:fontRef idx="minor">
+            <a:schemeClr val="lt1"/>
+          </a:fontRef>
+        </p:style>
+        <p:txBody>
+          <a:bodyPr rtlCol="0" anchor="ctr"/>
+          <a:lstStyle/>
+          <a:p>
+            <a:pPr algn="ctr"/>
+          </a:p>
+        </p:txBody>
+      </p:sp>
+      <p:sp>
+        <p:nvSpPr>
+          <p:cNvPr id="3" name="Rectangle 2"/>
+          <p:cNvSpPr/>
+          <p:nvPr/>
+        </p:nvSpPr>
+        <p:spPr>
+          <a:xfrm>
+            <a:off x="0" y="0"/>
+            <a:ext cx="12188952" cy="50292"/>
+          </a:xfrm>
+          <a:prstGeom prst="rect">
+            <a:avLst/>
+          </a:prstGeom>
+          <a:solidFill>
             <a:srgbClr val="1F2C56"/>
           </a:solidFill>
           <a:ln>
@@ -9610,14 +9741,14 @@
       </p:sp>
       <p:sp>
         <p:nvSpPr>
-          <p:cNvPr id="3" name="TextBox 2"/>
+          <p:cNvPr id="4" name="TextBox 3"/>
           <p:cNvSpPr txBox="1"/>
           <p:nvPr/>
         </p:nvSpPr>
         <p:spPr>
           <a:xfrm>
-            <a:off x="685800" y="2377440"/>
-            <a:ext cx="10817352" cy="365760"/>
+            <a:off x="685800" y="109728"/>
+            <a:ext cx="10817352" cy="228600"/>
           </a:xfrm>
           <a:prstGeom prst="rect">
             <a:avLst/>
@@ -9632,27 +9763,70 @@
           <a:p>
             <a:pPr algn="l"/>
             <a:r>
-              <a:rPr sz="1200">
-                <a:solidFill>
-                  <a:srgbClr val="D9C089"/>
+              <a:rPr sz="750">
+                <a:solidFill>
+                  <a:srgbClr val="78808C"/>
                 </a:solidFill>
                 <a:latin typeface="Consolas"/>
               </a:rPr>
-              <a:t>ABSCHLUSS</a:t>
-            </a:r>
-          </a:p>
-        </p:txBody>
-      </p:sp>
-      <p:sp>
-        <p:nvSpPr>
-          <p:cNvPr id="4" name="Rectangle 3"/>
+              <a:t>TL05  ·  ARBEITSBLATT</a:t>
+            </a:r>
+          </a:p>
+        </p:txBody>
+      </p:sp>
+      <p:sp>
+        <p:nvSpPr>
+          <p:cNvPr id="5" name="Rectangle 4"/>
           <p:cNvSpPr/>
           <p:nvPr/>
         </p:nvSpPr>
         <p:spPr>
           <a:xfrm>
-            <a:off x="685800" y="2788920"/>
-            <a:ext cx="548640" cy="38100"/>
+            <a:off x="0" y="1234440"/>
+            <a:ext cx="12188952" cy="12700"/>
+          </a:xfrm>
+          <a:prstGeom prst="rect">
+            <a:avLst/>
+          </a:prstGeom>
+          <a:solidFill>
+            <a:srgbClr val="D8DFE4"/>
+          </a:solidFill>
+          <a:ln>
+            <a:noFill/>
+          </a:ln>
+        </p:spPr>
+        <p:style>
+          <a:lnRef idx="1">
+            <a:schemeClr val="accent1"/>
+          </a:lnRef>
+          <a:fillRef idx="3">
+            <a:schemeClr val="accent1"/>
+          </a:fillRef>
+          <a:effectRef idx="2">
+            <a:schemeClr val="accent1"/>
+          </a:effectRef>
+          <a:fontRef idx="minor">
+            <a:schemeClr val="lt1"/>
+          </a:fontRef>
+        </p:style>
+        <p:txBody>
+          <a:bodyPr rtlCol="0" anchor="ctr"/>
+          <a:lstStyle/>
+          <a:p>
+            <a:pPr algn="ctr"/>
+          </a:p>
+        </p:txBody>
+      </p:sp>
+      <p:sp>
+        <p:nvSpPr>
+          <p:cNvPr id="6" name="Rectangle 5"/>
+          <p:cNvSpPr/>
+          <p:nvPr/>
+        </p:nvSpPr>
+        <p:spPr>
+          <a:xfrm>
+            <a:off x="685800" y="502920"/>
+            <a:ext cx="36576" cy="658368"/>
           </a:xfrm>
           <a:prstGeom prst="rect">
             <a:avLst/>
@@ -9688,14 +9862,14 @@
       </p:sp>
       <p:sp>
         <p:nvSpPr>
-          <p:cNvPr id="5" name="TextBox 4"/>
+          <p:cNvPr id="7" name="TextBox 6"/>
           <p:cNvSpPr txBox="1"/>
           <p:nvPr/>
         </p:nvSpPr>
         <p:spPr>
           <a:xfrm>
-            <a:off x="685800" y="3017520"/>
-            <a:ext cx="10817352" cy="1463040"/>
+            <a:off x="813816" y="502920"/>
+            <a:ext cx="10634472" cy="685800"/>
           </a:xfrm>
           <a:prstGeom prst="rect">
             <a:avLst/>
@@ -9710,27 +9884,27 @@
           <a:p>
             <a:pPr algn="l"/>
             <a:r>
-              <a:rPr sz="4000" b="1" i="0">
-                <a:solidFill>
-                  <a:srgbClr val="FFFFFF"/>
+              <a:rPr sz="2400" b="1" i="0">
+                <a:solidFill>
+                  <a:srgbClr val="1F2C56"/>
                 </a:solidFill>
                 <a:latin typeface="Arial"/>
               </a:rPr>
-              <a:t>Transfer &amp; Haltung</a:t>
-            </a:r>
-          </a:p>
-        </p:txBody>
-      </p:sp>
-      <p:sp>
-        <p:nvSpPr>
-          <p:cNvPr id="6" name="TextBox 5"/>
+              <a:t>AB-2: Formulieren – nicht proben, sondern schreiben</a:t>
+            </a:r>
+          </a:p>
+        </p:txBody>
+      </p:sp>
+      <p:sp>
+        <p:nvSpPr>
+          <p:cNvPr id="8" name="TextBox 7"/>
           <p:cNvSpPr txBox="1"/>
           <p:nvPr/>
         </p:nvSpPr>
         <p:spPr>
           <a:xfrm>
-            <a:off x="685800" y="4480560"/>
-            <a:ext cx="8653881" cy="1280160"/>
+            <a:off x="685800" y="1554480"/>
+            <a:ext cx="10817352" cy="3840480"/>
           </a:xfrm>
           <a:prstGeom prst="rect">
             <a:avLst/>
@@ -9743,29 +9917,233 @@
           </a:bodyPr>
           <a:lstStyle/>
           <a:p>
+            <a:pPr marL="190500" indent="-190500">
+              <a:spcBef>
+                <a:spcPts val="400"/>
+              </a:spcBef>
+              <a:spcAft>
+                <a:spcPts val="200"/>
+              </a:spcAft>
+            </a:pPr>
+            <a:r>
+              <a:rPr sz="1400">
+                <a:solidFill>
+                  <a:srgbClr val="3D5466"/>
+                </a:solidFill>
+                <a:latin typeface="Arial"/>
+              </a:rPr>
+              <a:t>▸  Schritt 1: Halbjahresziel für Sandra SMART formulieren.</a:t>
+            </a:r>
+          </a:p>
+          <a:p>
+            <a:pPr marL="190500" indent="-190500">
+              <a:spcBef>
+                <a:spcPts val="400"/>
+              </a:spcBef>
+              <a:spcAft>
+                <a:spcPts val="200"/>
+              </a:spcAft>
+            </a:pPr>
+            <a:r>
+              <a:rPr sz="1400">
+                <a:solidFill>
+                  <a:srgbClr val="3D5466"/>
+                </a:solidFill>
+                <a:latin typeface="Arial"/>
+              </a:rPr>
+              <a:t>▸  Schritt 2: Zwei partizipative Fragen entwickeln.</a:t>
+            </a:r>
+          </a:p>
+          <a:p>
+            <a:pPr marL="190500" indent="-190500">
+              <a:spcBef>
+                <a:spcPts val="400"/>
+              </a:spcBef>
+              <a:spcAft>
+                <a:spcPts val="200"/>
+              </a:spcAft>
+            </a:pPr>
+            <a:r>
+              <a:rPr sz="1400">
+                <a:solidFill>
+                  <a:srgbClr val="3D5466"/>
+                </a:solidFill>
+                <a:latin typeface="Arial"/>
+              </a:rPr>
+              <a:t>▸  Schritt 3: Einstiegssatz – Stärke, Entwicklungsfrage, Einladung.</a:t>
+            </a:r>
+          </a:p>
+          <a:p>
+            <a:pPr marL="190500" indent="-190500">
+              <a:spcBef>
+                <a:spcPts val="400"/>
+              </a:spcBef>
+              <a:spcAft>
+                <a:spcPts val="200"/>
+              </a:spcAft>
+            </a:pPr>
+            <a:r>
+              <a:rPr sz="1400">
+                <a:solidFill>
+                  <a:srgbClr val="3D5466"/>
+                </a:solidFill>
+                <a:latin typeface="Arial"/>
+              </a:rPr>
+              <a:t>▸  Schritt 4: Sprachcheck in 2er-Gruppen – aus Mitarbeiterperspektive.</a:t>
+            </a:r>
+          </a:p>
+          <a:p>
+            <a:pPr marL="190500" indent="-190500">
+              <a:spcBef>
+                <a:spcPts val="400"/>
+              </a:spcBef>
+              <a:spcAft>
+                <a:spcPts val="200"/>
+              </a:spcAft>
+            </a:pPr>
+            <a:r>
+              <a:rPr sz="1400">
+                <a:solidFill>
+                  <a:srgbClr val="3D5466"/>
+                </a:solidFill>
+                <a:latin typeface="Arial"/>
+              </a:rPr>
+              <a:t>▸  Schritt 5: Zweite Version des Einstiegssatzes schreiben.</a:t>
+            </a:r>
+          </a:p>
+        </p:txBody>
+      </p:sp>
+      <p:sp>
+        <p:nvSpPr>
+          <p:cNvPr id="9" name="Rectangle 8"/>
+          <p:cNvSpPr/>
+          <p:nvPr/>
+        </p:nvSpPr>
+        <p:spPr>
+          <a:xfrm>
+            <a:off x="685800" y="5486400"/>
+            <a:ext cx="10817352" cy="640080"/>
+          </a:xfrm>
+          <a:prstGeom prst="rect">
+            <a:avLst/>
+          </a:prstGeom>
+          <a:solidFill>
+            <a:srgbClr val="1F2C56"/>
+          </a:solidFill>
+          <a:ln>
+            <a:noFill/>
+          </a:ln>
+        </p:spPr>
+        <p:style>
+          <a:lnRef idx="1">
+            <a:schemeClr val="accent1"/>
+          </a:lnRef>
+          <a:fillRef idx="3">
+            <a:schemeClr val="accent1"/>
+          </a:fillRef>
+          <a:effectRef idx="2">
+            <a:schemeClr val="accent1"/>
+          </a:effectRef>
+          <a:fontRef idx="minor">
+            <a:schemeClr val="lt1"/>
+          </a:fontRef>
+        </p:style>
+        <p:txBody>
+          <a:bodyPr rtlCol="0" anchor="ctr"/>
+          <a:lstStyle/>
+          <a:p>
+            <a:pPr algn="ctr"/>
+          </a:p>
+        </p:txBody>
+      </p:sp>
+      <p:sp>
+        <p:nvSpPr>
+          <p:cNvPr id="10" name="TextBox 9"/>
+          <p:cNvSpPr txBox="1"/>
+          <p:nvPr/>
+        </p:nvSpPr>
+        <p:spPr>
+          <a:xfrm>
+            <a:off x="868680" y="5596128"/>
+            <a:ext cx="10451592" cy="457200"/>
+          </a:xfrm>
+          <a:prstGeom prst="rect">
+            <a:avLst/>
+          </a:prstGeom>
+          <a:noFill/>
+        </p:spPr>
+        <p:txBody>
+          <a:bodyPr wrap="square">
+            <a:spAutoFit/>
+          </a:bodyPr>
+          <a:lstStyle/>
+          <a:p>
             <a:pPr algn="l"/>
             <a:r>
-              <a:rPr sz="1600" b="0" i="0">
-                <a:solidFill>
-                  <a:srgbClr val="C8D2E6"/>
+              <a:rPr sz="1300" b="1" i="0">
+                <a:solidFill>
+                  <a:srgbClr val="FFFFFF"/>
                 </a:solidFill>
                 <a:latin typeface="Arial"/>
               </a:rPr>
-              <a:t>Drei Aufgaben für die Praxis – und ein persönlicher Prüfstein</a:t>
-            </a:r>
-          </a:p>
-        </p:txBody>
-      </p:sp>
-      <p:sp>
-        <p:nvSpPr>
-          <p:cNvPr id="7" name="TextBox 6"/>
+              <a:t>→  Bearbeitung im Teilnehmer-Workbook (Arbeitsblatt mit Ausfüllfeldern)</a:t>
+            </a:r>
+          </a:p>
+        </p:txBody>
+      </p:sp>
+      <p:sp>
+        <p:nvSpPr>
+          <p:cNvPr id="11" name="Rectangle 10"/>
+          <p:cNvSpPr/>
+          <p:nvPr/>
+        </p:nvSpPr>
+        <p:spPr>
+          <a:xfrm>
+            <a:off x="0" y="6510528"/>
+            <a:ext cx="12188952" cy="347472"/>
+          </a:xfrm>
+          <a:prstGeom prst="rect">
+            <a:avLst/>
+          </a:prstGeom>
+          <a:solidFill>
+            <a:srgbClr val="0A1937"/>
+          </a:solidFill>
+          <a:ln>
+            <a:noFill/>
+          </a:ln>
+        </p:spPr>
+        <p:style>
+          <a:lnRef idx="1">
+            <a:schemeClr val="accent1"/>
+          </a:lnRef>
+          <a:fillRef idx="3">
+            <a:schemeClr val="accent1"/>
+          </a:fillRef>
+          <a:effectRef idx="2">
+            <a:schemeClr val="accent1"/>
+          </a:effectRef>
+          <a:fontRef idx="minor">
+            <a:schemeClr val="lt1"/>
+          </a:fontRef>
+        </p:style>
+        <p:txBody>
+          <a:bodyPr rtlCol="0" anchor="ctr"/>
+          <a:lstStyle/>
+          <a:p>
+            <a:pPr algn="ctr"/>
+          </a:p>
+        </p:txBody>
+      </p:sp>
+      <p:sp>
+        <p:nvSpPr>
+          <p:cNvPr id="12" name="TextBox 11"/>
           <p:cNvSpPr txBox="1"/>
           <p:nvPr/>
         </p:nvSpPr>
         <p:spPr>
           <a:xfrm>
-            <a:off x="685800" y="6355080"/>
-            <a:ext cx="10817352" cy="274320"/>
+            <a:off x="685800" y="6583680"/>
+            <a:ext cx="6490411" cy="256032"/>
           </a:xfrm>
           <a:prstGeom prst="rect">
             <a:avLst/>
@@ -9782,7 +10160,7 @@
             <a:r>
               <a:rPr sz="700">
                 <a:solidFill>
-                  <a:srgbClr val="8CA0C3"/>
+                  <a:srgbClr val="A0B4D2"/>
                 </a:solidFill>
                 <a:latin typeface="Consolas"/>
               </a:rPr>
@@ -9824,7 +10202,7 @@
             <a:avLst/>
           </a:prstGeom>
           <a:solidFill>
-            <a:srgbClr val="EDEDF3"/>
+            <a:srgbClr val="1F2C56"/>
           </a:solidFill>
           <a:ln>
             <a:noFill/>
@@ -9854,57 +10232,14 @@
       </p:sp>
       <p:sp>
         <p:nvSpPr>
-          <p:cNvPr id="3" name="Rectangle 2"/>
-          <p:cNvSpPr/>
-          <p:nvPr/>
-        </p:nvSpPr>
-        <p:spPr>
-          <a:xfrm>
-            <a:off x="0" y="0"/>
-            <a:ext cx="12188952" cy="50292"/>
-          </a:xfrm>
-          <a:prstGeom prst="rect">
-            <a:avLst/>
-          </a:prstGeom>
-          <a:solidFill>
-            <a:srgbClr val="1F2C56"/>
-          </a:solidFill>
-          <a:ln>
-            <a:noFill/>
-          </a:ln>
-        </p:spPr>
-        <p:style>
-          <a:lnRef idx="1">
-            <a:schemeClr val="accent1"/>
-          </a:lnRef>
-          <a:fillRef idx="3">
-            <a:schemeClr val="accent1"/>
-          </a:fillRef>
-          <a:effectRef idx="2">
-            <a:schemeClr val="accent1"/>
-          </a:effectRef>
-          <a:fontRef idx="minor">
-            <a:schemeClr val="lt1"/>
-          </a:fontRef>
-        </p:style>
-        <p:txBody>
-          <a:bodyPr rtlCol="0" anchor="ctr"/>
-          <a:lstStyle/>
-          <a:p>
-            <a:pPr algn="ctr"/>
-          </a:p>
-        </p:txBody>
-      </p:sp>
-      <p:sp>
-        <p:nvSpPr>
-          <p:cNvPr id="4" name="TextBox 3"/>
+          <p:cNvPr id="3" name="TextBox 2"/>
           <p:cNvSpPr txBox="1"/>
           <p:nvPr/>
         </p:nvSpPr>
         <p:spPr>
           <a:xfrm>
-            <a:off x="685800" y="109728"/>
-            <a:ext cx="10817352" cy="228600"/>
+            <a:off x="685800" y="2377440"/>
+            <a:ext cx="10817352" cy="365760"/>
           </a:xfrm>
           <a:prstGeom prst="rect">
             <a:avLst/>
@@ -9919,70 +10254,27 @@
           <a:p>
             <a:pPr algn="l"/>
             <a:r>
-              <a:rPr sz="750">
-                <a:solidFill>
-                  <a:srgbClr val="78808C"/>
+              <a:rPr sz="1200">
+                <a:solidFill>
+                  <a:srgbClr val="D9C089"/>
                 </a:solidFill>
                 <a:latin typeface="Consolas"/>
               </a:rPr>
-              <a:t>TL05  ·  INHALT</a:t>
-            </a:r>
-          </a:p>
-        </p:txBody>
-      </p:sp>
-      <p:sp>
-        <p:nvSpPr>
-          <p:cNvPr id="5" name="Rectangle 4"/>
+              <a:t>ABSCHLUSS</a:t>
+            </a:r>
+          </a:p>
+        </p:txBody>
+      </p:sp>
+      <p:sp>
+        <p:nvSpPr>
+          <p:cNvPr id="4" name="Rectangle 3"/>
           <p:cNvSpPr/>
           <p:nvPr/>
         </p:nvSpPr>
         <p:spPr>
           <a:xfrm>
-            <a:off x="0" y="1234440"/>
-            <a:ext cx="12188952" cy="12700"/>
-          </a:xfrm>
-          <a:prstGeom prst="rect">
-            <a:avLst/>
-          </a:prstGeom>
-          <a:solidFill>
-            <a:srgbClr val="D8DFE4"/>
-          </a:solidFill>
-          <a:ln>
-            <a:noFill/>
-          </a:ln>
-        </p:spPr>
-        <p:style>
-          <a:lnRef idx="1">
-            <a:schemeClr val="accent1"/>
-          </a:lnRef>
-          <a:fillRef idx="3">
-            <a:schemeClr val="accent1"/>
-          </a:fillRef>
-          <a:effectRef idx="2">
-            <a:schemeClr val="accent1"/>
-          </a:effectRef>
-          <a:fontRef idx="minor">
-            <a:schemeClr val="lt1"/>
-          </a:fontRef>
-        </p:style>
-        <p:txBody>
-          <a:bodyPr rtlCol="0" anchor="ctr"/>
-          <a:lstStyle/>
-          <a:p>
-            <a:pPr algn="ctr"/>
-          </a:p>
-        </p:txBody>
-      </p:sp>
-      <p:sp>
-        <p:nvSpPr>
-          <p:cNvPr id="6" name="Rectangle 5"/>
-          <p:cNvSpPr/>
-          <p:nvPr/>
-        </p:nvSpPr>
-        <p:spPr>
-          <a:xfrm>
-            <a:off x="685800" y="502920"/>
-            <a:ext cx="36576" cy="658368"/>
+            <a:off x="685800" y="2788920"/>
+            <a:ext cx="548640" cy="38100"/>
           </a:xfrm>
           <a:prstGeom prst="rect">
             <a:avLst/>
@@ -10018,14 +10310,14 @@
       </p:sp>
       <p:sp>
         <p:nvSpPr>
-          <p:cNvPr id="7" name="TextBox 6"/>
+          <p:cNvPr id="5" name="TextBox 4"/>
           <p:cNvSpPr txBox="1"/>
           <p:nvPr/>
         </p:nvSpPr>
         <p:spPr>
           <a:xfrm>
-            <a:off x="813816" y="502920"/>
-            <a:ext cx="10634472" cy="685800"/>
+            <a:off x="685800" y="3017520"/>
+            <a:ext cx="10817352" cy="1463040"/>
           </a:xfrm>
           <a:prstGeom prst="rect">
             <a:avLst/>
@@ -10040,27 +10332,27 @@
           <a:p>
             <a:pPr algn="l"/>
             <a:r>
-              <a:rPr sz="2400" b="1" i="0">
-                <a:solidFill>
-                  <a:srgbClr val="1F2C56"/>
+              <a:rPr sz="4000" b="1" i="0">
+                <a:solidFill>
+                  <a:srgbClr val="FFFFFF"/>
                 </a:solidFill>
                 <a:latin typeface="Arial"/>
               </a:rPr>
-              <a:t>Drei Transferaufgaben für die nächsten zwei Wochen</a:t>
-            </a:r>
-          </a:p>
-        </p:txBody>
-      </p:sp>
-      <p:sp>
-        <p:nvSpPr>
-          <p:cNvPr id="8" name="TextBox 7"/>
+              <a:t>Transfer &amp; Haltung</a:t>
+            </a:r>
+          </a:p>
+        </p:txBody>
+      </p:sp>
+      <p:sp>
+        <p:nvSpPr>
+          <p:cNvPr id="6" name="TextBox 5"/>
           <p:cNvSpPr txBox="1"/>
           <p:nvPr/>
         </p:nvSpPr>
         <p:spPr>
           <a:xfrm>
-            <a:off x="685800" y="1417320"/>
-            <a:ext cx="10817352" cy="4892040"/>
+            <a:off x="685800" y="4480560"/>
+            <a:ext cx="8653881" cy="1280160"/>
           </a:xfrm>
           <a:prstGeom prst="rect">
             <a:avLst/>
@@ -10068,122 +10360,34 @@
           <a:noFill/>
         </p:spPr>
         <p:txBody>
-          <a:bodyPr wrap="square" anchor="ctr">
+          <a:bodyPr wrap="square">
             <a:spAutoFit/>
           </a:bodyPr>
           <a:lstStyle/>
           <a:p>
-            <a:pPr marL="190500" indent="-190500">
-              <a:spcBef>
-                <a:spcPts val="400"/>
-              </a:spcBef>
-              <a:spcAft>
-                <a:spcPts val="200"/>
-              </a:spcAft>
-            </a:pPr>
-            <a:r>
-              <a:rPr sz="1300">
-                <a:solidFill>
-                  <a:srgbClr val="3D5466"/>
+            <a:pPr algn="l"/>
+            <a:r>
+              <a:rPr sz="1600" b="0" i="0">
+                <a:solidFill>
+                  <a:srgbClr val="C8D2E6"/>
                 </a:solidFill>
                 <a:latin typeface="Arial"/>
               </a:rPr>
-              <a:t>▸  1: Zielvereinbarungen der letzten Periode im SMART-Check überprüfen.</a:t>
-            </a:r>
-          </a:p>
-          <a:p>
-            <a:pPr marL="190500" indent="-190500">
-              <a:spcBef>
-                <a:spcPts val="400"/>
-              </a:spcBef>
-              <a:spcAft>
-                <a:spcPts val="200"/>
-              </a:spcAft>
-            </a:pPr>
-            <a:r>
-              <a:rPr sz="1300">
-                <a:solidFill>
-                  <a:srgbClr val="3D5466"/>
-                </a:solidFill>
-                <a:latin typeface="Arial"/>
-              </a:rPr>
-              <a:t>▸  2: Ein Gespräch nach der Fünf-Schritte-Struktur führen und dokumentieren.</a:t>
-            </a:r>
-          </a:p>
-          <a:p>
-            <a:pPr marL="190500" indent="-190500">
-              <a:spcBef>
-                <a:spcPts val="400"/>
-              </a:spcBef>
-              <a:spcAft>
-                <a:spcPts val="200"/>
-              </a:spcAft>
-            </a:pPr>
-            <a:r>
-              <a:rPr sz="1300">
-                <a:solidFill>
-                  <a:srgbClr val="3D5466"/>
-                </a:solidFill>
-                <a:latin typeface="Arial"/>
-              </a:rPr>
-              <a:t>▸  3: Schwierige Konstellation schriftlich vorbereiten – als kollegialen Fall einbringen.</a:t>
-            </a:r>
-          </a:p>
-        </p:txBody>
-      </p:sp>
-      <p:sp>
-        <p:nvSpPr>
-          <p:cNvPr id="9" name="Rectangle 8"/>
-          <p:cNvSpPr/>
-          <p:nvPr/>
-        </p:nvSpPr>
-        <p:spPr>
-          <a:xfrm>
-            <a:off x="0" y="6510528"/>
-            <a:ext cx="12188952" cy="347472"/>
-          </a:xfrm>
-          <a:prstGeom prst="rect">
-            <a:avLst/>
-          </a:prstGeom>
-          <a:solidFill>
-            <a:srgbClr val="0A1937"/>
-          </a:solidFill>
-          <a:ln>
-            <a:noFill/>
-          </a:ln>
-        </p:spPr>
-        <p:style>
-          <a:lnRef idx="1">
-            <a:schemeClr val="accent1"/>
-          </a:lnRef>
-          <a:fillRef idx="3">
-            <a:schemeClr val="accent1"/>
-          </a:fillRef>
-          <a:effectRef idx="2">
-            <a:schemeClr val="accent1"/>
-          </a:effectRef>
-          <a:fontRef idx="minor">
-            <a:schemeClr val="lt1"/>
-          </a:fontRef>
-        </p:style>
-        <p:txBody>
-          <a:bodyPr rtlCol="0" anchor="ctr"/>
-          <a:lstStyle/>
-          <a:p>
-            <a:pPr algn="ctr"/>
-          </a:p>
-        </p:txBody>
-      </p:sp>
-      <p:sp>
-        <p:nvSpPr>
-          <p:cNvPr id="10" name="TextBox 9"/>
+              <a:t>Drei Aufgaben für die Praxis – und ein persönlicher Prüfstein</a:t>
+            </a:r>
+          </a:p>
+        </p:txBody>
+      </p:sp>
+      <p:sp>
+        <p:nvSpPr>
+          <p:cNvPr id="7" name="TextBox 6"/>
           <p:cNvSpPr txBox="1"/>
           <p:nvPr/>
         </p:nvSpPr>
         <p:spPr>
           <a:xfrm>
-            <a:off x="685800" y="6583680"/>
-            <a:ext cx="6490411" cy="256032"/>
+            <a:off x="685800" y="6355080"/>
+            <a:ext cx="10817352" cy="274320"/>
           </a:xfrm>
           <a:prstGeom prst="rect">
             <a:avLst/>
@@ -10200,7 +10404,7 @@
             <a:r>
               <a:rPr sz="700">
                 <a:solidFill>
-                  <a:srgbClr val="A0B4D2"/>
+                  <a:srgbClr val="8CA0C3"/>
                 </a:solidFill>
                 <a:latin typeface="Consolas"/>
               </a:rPr>
@@ -10218,6 +10422,424 @@
 </file>
 
 <file path=ppt/slides/slide23.xml><?xml version="1.0" encoding="utf-8"?>
+<p:sld xmlns:a="http://schemas.openxmlformats.org/drawingml/2006/main" xmlns:p="http://schemas.openxmlformats.org/presentationml/2006/main" xmlns:r="http://schemas.openxmlformats.org/officeDocument/2006/relationships">
+  <p:cSld>
+    <p:spTree>
+      <p:nvGrpSpPr>
+        <p:cNvPr id="1" name=""/>
+        <p:cNvGrpSpPr/>
+        <p:nvPr/>
+      </p:nvGrpSpPr>
+      <p:grpSpPr/>
+      <p:sp>
+        <p:nvSpPr>
+          <p:cNvPr id="2" name="Rectangle 1"/>
+          <p:cNvSpPr/>
+          <p:nvPr/>
+        </p:nvSpPr>
+        <p:spPr>
+          <a:xfrm>
+            <a:off x="0" y="0"/>
+            <a:ext cx="12188952" cy="6858000"/>
+          </a:xfrm>
+          <a:prstGeom prst="rect">
+            <a:avLst/>
+          </a:prstGeom>
+          <a:solidFill>
+            <a:srgbClr val="EDEDF3"/>
+          </a:solidFill>
+          <a:ln>
+            <a:noFill/>
+          </a:ln>
+        </p:spPr>
+        <p:style>
+          <a:lnRef idx="1">
+            <a:schemeClr val="accent1"/>
+          </a:lnRef>
+          <a:fillRef idx="3">
+            <a:schemeClr val="accent1"/>
+          </a:fillRef>
+          <a:effectRef idx="2">
+            <a:schemeClr val="accent1"/>
+          </a:effectRef>
+          <a:fontRef idx="minor">
+            <a:schemeClr val="lt1"/>
+          </a:fontRef>
+        </p:style>
+        <p:txBody>
+          <a:bodyPr rtlCol="0" anchor="ctr"/>
+          <a:lstStyle/>
+          <a:p>
+            <a:pPr algn="ctr"/>
+          </a:p>
+        </p:txBody>
+      </p:sp>
+      <p:sp>
+        <p:nvSpPr>
+          <p:cNvPr id="3" name="Rectangle 2"/>
+          <p:cNvSpPr/>
+          <p:nvPr/>
+        </p:nvSpPr>
+        <p:spPr>
+          <a:xfrm>
+            <a:off x="0" y="0"/>
+            <a:ext cx="12188952" cy="50292"/>
+          </a:xfrm>
+          <a:prstGeom prst="rect">
+            <a:avLst/>
+          </a:prstGeom>
+          <a:solidFill>
+            <a:srgbClr val="1F2C56"/>
+          </a:solidFill>
+          <a:ln>
+            <a:noFill/>
+          </a:ln>
+        </p:spPr>
+        <p:style>
+          <a:lnRef idx="1">
+            <a:schemeClr val="accent1"/>
+          </a:lnRef>
+          <a:fillRef idx="3">
+            <a:schemeClr val="accent1"/>
+          </a:fillRef>
+          <a:effectRef idx="2">
+            <a:schemeClr val="accent1"/>
+          </a:effectRef>
+          <a:fontRef idx="minor">
+            <a:schemeClr val="lt1"/>
+          </a:fontRef>
+        </p:style>
+        <p:txBody>
+          <a:bodyPr rtlCol="0" anchor="ctr"/>
+          <a:lstStyle/>
+          <a:p>
+            <a:pPr algn="ctr"/>
+          </a:p>
+        </p:txBody>
+      </p:sp>
+      <p:sp>
+        <p:nvSpPr>
+          <p:cNvPr id="4" name="TextBox 3"/>
+          <p:cNvSpPr txBox="1"/>
+          <p:nvPr/>
+        </p:nvSpPr>
+        <p:spPr>
+          <a:xfrm>
+            <a:off x="685800" y="109728"/>
+            <a:ext cx="10817352" cy="228600"/>
+          </a:xfrm>
+          <a:prstGeom prst="rect">
+            <a:avLst/>
+          </a:prstGeom>
+          <a:noFill/>
+        </p:spPr>
+        <p:txBody>
+          <a:bodyPr wrap="none">
+            <a:spAutoFit/>
+          </a:bodyPr>
+          <a:lstStyle/>
+          <a:p>
+            <a:pPr algn="l"/>
+            <a:r>
+              <a:rPr sz="750">
+                <a:solidFill>
+                  <a:srgbClr val="78808C"/>
+                </a:solidFill>
+                <a:latin typeface="Consolas"/>
+              </a:rPr>
+              <a:t>TL05  ·  INHALT</a:t>
+            </a:r>
+          </a:p>
+        </p:txBody>
+      </p:sp>
+      <p:sp>
+        <p:nvSpPr>
+          <p:cNvPr id="5" name="Rectangle 4"/>
+          <p:cNvSpPr/>
+          <p:nvPr/>
+        </p:nvSpPr>
+        <p:spPr>
+          <a:xfrm>
+            <a:off x="0" y="1234440"/>
+            <a:ext cx="12188952" cy="12700"/>
+          </a:xfrm>
+          <a:prstGeom prst="rect">
+            <a:avLst/>
+          </a:prstGeom>
+          <a:solidFill>
+            <a:srgbClr val="D8DFE4"/>
+          </a:solidFill>
+          <a:ln>
+            <a:noFill/>
+          </a:ln>
+        </p:spPr>
+        <p:style>
+          <a:lnRef idx="1">
+            <a:schemeClr val="accent1"/>
+          </a:lnRef>
+          <a:fillRef idx="3">
+            <a:schemeClr val="accent1"/>
+          </a:fillRef>
+          <a:effectRef idx="2">
+            <a:schemeClr val="accent1"/>
+          </a:effectRef>
+          <a:fontRef idx="minor">
+            <a:schemeClr val="lt1"/>
+          </a:fontRef>
+        </p:style>
+        <p:txBody>
+          <a:bodyPr rtlCol="0" anchor="ctr"/>
+          <a:lstStyle/>
+          <a:p>
+            <a:pPr algn="ctr"/>
+          </a:p>
+        </p:txBody>
+      </p:sp>
+      <p:sp>
+        <p:nvSpPr>
+          <p:cNvPr id="6" name="Rectangle 5"/>
+          <p:cNvSpPr/>
+          <p:nvPr/>
+        </p:nvSpPr>
+        <p:spPr>
+          <a:xfrm>
+            <a:off x="685800" y="502920"/>
+            <a:ext cx="36576" cy="658368"/>
+          </a:xfrm>
+          <a:prstGeom prst="rect">
+            <a:avLst/>
+          </a:prstGeom>
+          <a:solidFill>
+            <a:srgbClr val="D9C089"/>
+          </a:solidFill>
+          <a:ln>
+            <a:noFill/>
+          </a:ln>
+        </p:spPr>
+        <p:style>
+          <a:lnRef idx="1">
+            <a:schemeClr val="accent1"/>
+          </a:lnRef>
+          <a:fillRef idx="3">
+            <a:schemeClr val="accent1"/>
+          </a:fillRef>
+          <a:effectRef idx="2">
+            <a:schemeClr val="accent1"/>
+          </a:effectRef>
+          <a:fontRef idx="minor">
+            <a:schemeClr val="lt1"/>
+          </a:fontRef>
+        </p:style>
+        <p:txBody>
+          <a:bodyPr rtlCol="0" anchor="ctr"/>
+          <a:lstStyle/>
+          <a:p>
+            <a:pPr algn="ctr"/>
+          </a:p>
+        </p:txBody>
+      </p:sp>
+      <p:sp>
+        <p:nvSpPr>
+          <p:cNvPr id="7" name="TextBox 6"/>
+          <p:cNvSpPr txBox="1"/>
+          <p:nvPr/>
+        </p:nvSpPr>
+        <p:spPr>
+          <a:xfrm>
+            <a:off x="813816" y="502920"/>
+            <a:ext cx="10634472" cy="685800"/>
+          </a:xfrm>
+          <a:prstGeom prst="rect">
+            <a:avLst/>
+          </a:prstGeom>
+          <a:noFill/>
+        </p:spPr>
+        <p:txBody>
+          <a:bodyPr wrap="square">
+            <a:spAutoFit/>
+          </a:bodyPr>
+          <a:lstStyle/>
+          <a:p>
+            <a:pPr algn="l"/>
+            <a:r>
+              <a:rPr sz="2400" b="1" i="0">
+                <a:solidFill>
+                  <a:srgbClr val="1F2C56"/>
+                </a:solidFill>
+                <a:latin typeface="Arial"/>
+              </a:rPr>
+              <a:t>Drei Transferaufgaben für die nächsten zwei Wochen</a:t>
+            </a:r>
+          </a:p>
+        </p:txBody>
+      </p:sp>
+      <p:sp>
+        <p:nvSpPr>
+          <p:cNvPr id="8" name="TextBox 7"/>
+          <p:cNvSpPr txBox="1"/>
+          <p:nvPr/>
+        </p:nvSpPr>
+        <p:spPr>
+          <a:xfrm>
+            <a:off x="685800" y="1417320"/>
+            <a:ext cx="10817352" cy="4892040"/>
+          </a:xfrm>
+          <a:prstGeom prst="rect">
+            <a:avLst/>
+          </a:prstGeom>
+          <a:noFill/>
+        </p:spPr>
+        <p:txBody>
+          <a:bodyPr wrap="square" anchor="ctr">
+            <a:spAutoFit/>
+          </a:bodyPr>
+          <a:lstStyle/>
+          <a:p>
+            <a:pPr marL="190500" indent="-190500">
+              <a:spcBef>
+                <a:spcPts val="400"/>
+              </a:spcBef>
+              <a:spcAft>
+                <a:spcPts val="200"/>
+              </a:spcAft>
+            </a:pPr>
+            <a:r>
+              <a:rPr sz="1300">
+                <a:solidFill>
+                  <a:srgbClr val="3D5466"/>
+                </a:solidFill>
+                <a:latin typeface="Arial"/>
+              </a:rPr>
+              <a:t>▸  1: Zielvereinbarungen der letzten Periode im SMART-Check überprüfen.</a:t>
+            </a:r>
+          </a:p>
+          <a:p>
+            <a:pPr marL="190500" indent="-190500">
+              <a:spcBef>
+                <a:spcPts val="400"/>
+              </a:spcBef>
+              <a:spcAft>
+                <a:spcPts val="200"/>
+              </a:spcAft>
+            </a:pPr>
+            <a:r>
+              <a:rPr sz="1300">
+                <a:solidFill>
+                  <a:srgbClr val="3D5466"/>
+                </a:solidFill>
+                <a:latin typeface="Arial"/>
+              </a:rPr>
+              <a:t>▸  2: Ein Gespräch nach der Fünf-Schritte-Struktur führen und dokumentieren.</a:t>
+            </a:r>
+          </a:p>
+          <a:p>
+            <a:pPr marL="190500" indent="-190500">
+              <a:spcBef>
+                <a:spcPts val="400"/>
+              </a:spcBef>
+              <a:spcAft>
+                <a:spcPts val="200"/>
+              </a:spcAft>
+            </a:pPr>
+            <a:r>
+              <a:rPr sz="1300">
+                <a:solidFill>
+                  <a:srgbClr val="3D5466"/>
+                </a:solidFill>
+                <a:latin typeface="Arial"/>
+              </a:rPr>
+              <a:t>▸  3: Schwierige Konstellation schriftlich vorbereiten – als kollegialen Fall einbringen.</a:t>
+            </a:r>
+          </a:p>
+        </p:txBody>
+      </p:sp>
+      <p:sp>
+        <p:nvSpPr>
+          <p:cNvPr id="9" name="Rectangle 8"/>
+          <p:cNvSpPr/>
+          <p:nvPr/>
+        </p:nvSpPr>
+        <p:spPr>
+          <a:xfrm>
+            <a:off x="0" y="6510528"/>
+            <a:ext cx="12188952" cy="347472"/>
+          </a:xfrm>
+          <a:prstGeom prst="rect">
+            <a:avLst/>
+          </a:prstGeom>
+          <a:solidFill>
+            <a:srgbClr val="0A1937"/>
+          </a:solidFill>
+          <a:ln>
+            <a:noFill/>
+          </a:ln>
+        </p:spPr>
+        <p:style>
+          <a:lnRef idx="1">
+            <a:schemeClr val="accent1"/>
+          </a:lnRef>
+          <a:fillRef idx="3">
+            <a:schemeClr val="accent1"/>
+          </a:fillRef>
+          <a:effectRef idx="2">
+            <a:schemeClr val="accent1"/>
+          </a:effectRef>
+          <a:fontRef idx="minor">
+            <a:schemeClr val="lt1"/>
+          </a:fontRef>
+        </p:style>
+        <p:txBody>
+          <a:bodyPr rtlCol="0" anchor="ctr"/>
+          <a:lstStyle/>
+          <a:p>
+            <a:pPr algn="ctr"/>
+          </a:p>
+        </p:txBody>
+      </p:sp>
+      <p:sp>
+        <p:nvSpPr>
+          <p:cNvPr id="10" name="TextBox 9"/>
+          <p:cNvSpPr txBox="1"/>
+          <p:nvPr/>
+        </p:nvSpPr>
+        <p:spPr>
+          <a:xfrm>
+            <a:off x="685800" y="6583680"/>
+            <a:ext cx="6490411" cy="256032"/>
+          </a:xfrm>
+          <a:prstGeom prst="rect">
+            <a:avLst/>
+          </a:prstGeom>
+          <a:noFill/>
+        </p:spPr>
+        <p:txBody>
+          <a:bodyPr wrap="none">
+            <a:spAutoFit/>
+          </a:bodyPr>
+          <a:lstStyle/>
+          <a:p>
+            <a:pPr algn="l"/>
+            <a:r>
+              <a:rPr sz="700">
+                <a:solidFill>
+                  <a:srgbClr val="A0B4D2"/>
+                </a:solidFill>
+                <a:latin typeface="Consolas"/>
+              </a:rPr>
+              <a:t>FKB Campus  ·  TL05</a:t>
+            </a:r>
+          </a:p>
+        </p:txBody>
+      </p:sp>
+    </p:spTree>
+  </p:cSld>
+  <p:clrMapOvr>
+    <a:masterClrMapping/>
+  </p:clrMapOvr>
+</p:sld>
+</file>
+
+<file path=ppt/slides/slide24.xml><?xml version="1.0" encoding="utf-8"?>
 <p:sld xmlns:a="http://schemas.openxmlformats.org/drawingml/2006/main" xmlns:p="http://schemas.openxmlformats.org/presentationml/2006/main" xmlns:r="http://schemas.openxmlformats.org/officeDocument/2006/relationships">
   <p:cSld>
     <p:spTree>
